--- a/fundamentals/slides/training.pptx
+++ b/fundamentals/slides/training.pptx
@@ -5,17 +5,18 @@
     <p:sldMasterId id="2147483671" r:id="rId4"/>
   </p:sldMasterIdLst>
   <p:notesMasterIdLst>
-    <p:notesMasterId r:id="rId10"/>
+    <p:notesMasterId r:id="rId11"/>
   </p:notesMasterIdLst>
   <p:handoutMasterIdLst>
-    <p:handoutMasterId r:id="rId11"/>
+    <p:handoutMasterId r:id="rId12"/>
   </p:handoutMasterIdLst>
   <p:sldIdLst>
     <p:sldId id="539" r:id="rId5"/>
-    <p:sldId id="257" r:id="rId6"/>
-    <p:sldId id="256" r:id="rId7"/>
+    <p:sldId id="564" r:id="rId6"/>
+    <p:sldId id="257" r:id="rId7"/>
     <p:sldId id="562" r:id="rId8"/>
-    <p:sldId id="555" r:id="rId9"/>
+    <p:sldId id="563" r:id="rId9"/>
+    <p:sldId id="256" r:id="rId10"/>
   </p:sldIdLst>
   <p:sldSz cx="12192000" cy="6858000"/>
   <p:notesSz cx="6858000" cy="9144000"/>
@@ -837,7 +838,7 @@
           <a:p>
             <a:fld id="{4C3B2649-7BD8-4005-A99E-30D13769A8BD}" type="slidenum">
               <a:rPr lang="en-US" smtClean="0"/>
-              <a:t>3</a:t>
+              <a:t>6</a:t>
             </a:fld>
             <a:endParaRPr lang="en-US" dirty="0"/>
           </a:p>
@@ -857,8 +858,437 @@
 </file>
 
 <file path=ppt/slideLayouts/slideLayout1.xml><?xml version="1.0" encoding="utf-8"?>
-<p:sldLayout xmlns:a="http://schemas.openxmlformats.org/drawingml/2006/main" xmlns:r="http://schemas.openxmlformats.org/officeDocument/2006/relationships" xmlns:p="http://schemas.openxmlformats.org/presentationml/2006/main" userDrawn="1">
-  <p:cSld name="Title">
+<p:sldLayout xmlns:a="http://schemas.openxmlformats.org/drawingml/2006/main" xmlns:r="http://schemas.openxmlformats.org/officeDocument/2006/relationships" xmlns:p="http://schemas.openxmlformats.org/presentationml/2006/main" preserve="1" userDrawn="1">
+  <p:cSld name="Agenda">
+    <p:spTree>
+      <p:nvGrpSpPr>
+        <p:cNvPr id="1" name=""/>
+        <p:cNvGrpSpPr/>
+        <p:nvPr/>
+      </p:nvGrpSpPr>
+      <p:grpSpPr>
+        <a:xfrm>
+          <a:off x="0" y="0"/>
+          <a:ext cx="0" cy="0"/>
+          <a:chOff x="0" y="0"/>
+          <a:chExt cx="0" cy="0"/>
+        </a:xfrm>
+      </p:grpSpPr>
+      <p:sp useBgFill="1">
+        <p:nvSpPr>
+          <p:cNvPr id="5" name="Rectangle 4">
+            <a:extLst>
+              <a:ext uri="{FF2B5EF4-FFF2-40B4-BE49-F238E27FC236}">
+                <a16:creationId xmlns:a16="http://schemas.microsoft.com/office/drawing/2014/main" id="{FAC5ABB9-3EAC-446C-B128-CFDB09B2476A}"/>
+              </a:ext>
+              <a:ext uri="{C183D7F6-B498-43B3-948B-1728B52AA6E4}">
+                <adec:decorative xmlns:adec="http://schemas.microsoft.com/office/drawing/2017/decorative" val="1"/>
+              </a:ext>
+            </a:extLst>
+          </p:cNvPr>
+          <p:cNvSpPr/>
+          <p:nvPr userDrawn="1"/>
+        </p:nvSpPr>
+        <p:spPr>
+          <a:xfrm>
+            <a:off x="0" y="2"/>
+            <a:ext cx="12192000" cy="6858000"/>
+          </a:xfrm>
+          <a:prstGeom prst="rect">
+            <a:avLst/>
+          </a:prstGeom>
+          <a:ln>
+            <a:noFill/>
+          </a:ln>
+        </p:spPr>
+        <p:style>
+          <a:lnRef idx="2">
+            <a:schemeClr val="accent1">
+              <a:shade val="50000"/>
+            </a:schemeClr>
+          </a:lnRef>
+          <a:fillRef idx="1">
+            <a:schemeClr val="accent1"/>
+          </a:fillRef>
+          <a:effectRef idx="0">
+            <a:schemeClr val="accent1"/>
+          </a:effectRef>
+          <a:fontRef idx="minor">
+            <a:schemeClr val="lt1"/>
+          </a:fontRef>
+        </p:style>
+        <p:txBody>
+          <a:bodyPr rtlCol="0" anchor="ctr"/>
+          <a:lstStyle/>
+          <a:p>
+            <a:pPr algn="ctr"/>
+            <a:endParaRPr lang="en-US" dirty="0"/>
+          </a:p>
+        </p:txBody>
+      </p:sp>
+      <p:sp>
+        <p:nvSpPr>
+          <p:cNvPr id="6" name="Rectangle 5">
+            <a:extLst>
+              <a:ext uri="{FF2B5EF4-FFF2-40B4-BE49-F238E27FC236}">
+                <a16:creationId xmlns:a16="http://schemas.microsoft.com/office/drawing/2014/main" id="{70DED2D7-7BC9-473D-8241-8289B5821CF4}"/>
+              </a:ext>
+              <a:ext uri="{C183D7F6-B498-43B3-948B-1728B52AA6E4}">
+                <adec:decorative xmlns:adec="http://schemas.microsoft.com/office/drawing/2017/decorative" val="1"/>
+              </a:ext>
+            </a:extLst>
+          </p:cNvPr>
+          <p:cNvSpPr/>
+          <p:nvPr userDrawn="1"/>
+        </p:nvSpPr>
+        <p:spPr>
+          <a:xfrm>
+            <a:off x="0" y="0"/>
+            <a:ext cx="12192000" cy="6858001"/>
+          </a:xfrm>
+          <a:prstGeom prst="rect">
+            <a:avLst/>
+          </a:prstGeom>
+          <a:gradFill flip="none" rotWithShape="1">
+            <a:gsLst>
+              <a:gs pos="10000">
+                <a:schemeClr val="accent5"/>
+              </a:gs>
+              <a:gs pos="90000">
+                <a:schemeClr val="accent1"/>
+              </a:gs>
+              <a:gs pos="70000">
+                <a:schemeClr val="accent2"/>
+              </a:gs>
+              <a:gs pos="30000">
+                <a:schemeClr val="accent4"/>
+              </a:gs>
+              <a:gs pos="50000">
+                <a:schemeClr val="accent3">
+                  <a:lumMod val="60000"/>
+                  <a:lumOff val="40000"/>
+                </a:schemeClr>
+              </a:gs>
+            </a:gsLst>
+            <a:lin ang="7200000" scaled="0"/>
+            <a:tileRect/>
+          </a:gradFill>
+          <a:ln>
+            <a:noFill/>
+          </a:ln>
+        </p:spPr>
+        <p:style>
+          <a:lnRef idx="2">
+            <a:schemeClr val="accent1">
+              <a:shade val="50000"/>
+            </a:schemeClr>
+          </a:lnRef>
+          <a:fillRef idx="1">
+            <a:schemeClr val="accent1"/>
+          </a:fillRef>
+          <a:effectRef idx="0">
+            <a:schemeClr val="accent1"/>
+          </a:effectRef>
+          <a:fontRef idx="minor">
+            <a:schemeClr val="lt1"/>
+          </a:fontRef>
+        </p:style>
+        <p:txBody>
+          <a:bodyPr rtlCol="0" anchor="ctr"/>
+          <a:lstStyle/>
+          <a:p>
+            <a:pPr algn="ctr"/>
+            <a:endParaRPr lang="en-US" dirty="0"/>
+          </a:p>
+        </p:txBody>
+      </p:sp>
+      <p:sp useBgFill="1">
+        <p:nvSpPr>
+          <p:cNvPr id="7" name="Rectangle 6">
+            <a:extLst>
+              <a:ext uri="{FF2B5EF4-FFF2-40B4-BE49-F238E27FC236}">
+                <a16:creationId xmlns:a16="http://schemas.microsoft.com/office/drawing/2014/main" id="{19C2616F-4436-4A60-BB08-54EC762C53BE}"/>
+              </a:ext>
+              <a:ext uri="{C183D7F6-B498-43B3-948B-1728B52AA6E4}">
+                <adec:decorative xmlns:adec="http://schemas.microsoft.com/office/drawing/2017/decorative" val="1"/>
+              </a:ext>
+            </a:extLst>
+          </p:cNvPr>
+          <p:cNvSpPr/>
+          <p:nvPr userDrawn="1"/>
+        </p:nvSpPr>
+        <p:spPr>
+          <a:xfrm>
+            <a:off x="0" y="762001"/>
+            <a:ext cx="12192000" cy="6095999"/>
+          </a:xfrm>
+          <a:prstGeom prst="rect">
+            <a:avLst/>
+          </a:prstGeom>
+          <a:ln w="76200">
+            <a:noFill/>
+          </a:ln>
+        </p:spPr>
+        <p:style>
+          <a:lnRef idx="2">
+            <a:schemeClr val="accent1">
+              <a:shade val="50000"/>
+            </a:schemeClr>
+          </a:lnRef>
+          <a:fillRef idx="1">
+            <a:schemeClr val="accent1"/>
+          </a:fillRef>
+          <a:effectRef idx="0">
+            <a:schemeClr val="accent1"/>
+          </a:effectRef>
+          <a:fontRef idx="minor">
+            <a:schemeClr val="lt1"/>
+          </a:fontRef>
+        </p:style>
+        <p:txBody>
+          <a:bodyPr rtlCol="0" anchor="ctr"/>
+          <a:lstStyle/>
+          <a:p>
+            <a:pPr algn="ctr"/>
+            <a:endParaRPr lang="en-US" dirty="0"/>
+          </a:p>
+        </p:txBody>
+      </p:sp>
+      <p:sp>
+        <p:nvSpPr>
+          <p:cNvPr id="9" name="Title 8">
+            <a:extLst>
+              <a:ext uri="{FF2B5EF4-FFF2-40B4-BE49-F238E27FC236}">
+                <a16:creationId xmlns:a16="http://schemas.microsoft.com/office/drawing/2014/main" id="{62A5B690-D47A-166B-0BEE-8CDC1BB59826}"/>
+              </a:ext>
+            </a:extLst>
+          </p:cNvPr>
+          <p:cNvSpPr>
+            <a:spLocks noGrp="1"/>
+          </p:cNvSpPr>
+          <p:nvPr>
+            <p:ph type="title"/>
+          </p:nvPr>
+        </p:nvSpPr>
+        <p:spPr>
+          <a:xfrm>
+            <a:off x="758952" y="1517904"/>
+            <a:ext cx="4114800" cy="4572000"/>
+          </a:xfrm>
+        </p:spPr>
+        <p:txBody>
+          <a:bodyPr>
+            <a:normAutofit/>
+          </a:bodyPr>
+          <a:lstStyle>
+            <a:lvl1pPr>
+              <a:defRPr sz="3200"/>
+            </a:lvl1pPr>
+          </a:lstStyle>
+          <a:p>
+            <a:r>
+              <a:rPr lang="en-US"/>
+              <a:t>Click to edit Master title style</a:t>
+            </a:r>
+            <a:endParaRPr lang="en-US" dirty="0"/>
+          </a:p>
+        </p:txBody>
+      </p:sp>
+      <p:sp>
+        <p:nvSpPr>
+          <p:cNvPr id="11" name="Content Placeholder 10">
+            <a:extLst>
+              <a:ext uri="{FF2B5EF4-FFF2-40B4-BE49-F238E27FC236}">
+                <a16:creationId xmlns:a16="http://schemas.microsoft.com/office/drawing/2014/main" id="{D99B7A4E-1E73-5148-8EF4-5232DBEAFE0B}"/>
+              </a:ext>
+            </a:extLst>
+          </p:cNvPr>
+          <p:cNvSpPr>
+            <a:spLocks noGrp="1"/>
+          </p:cNvSpPr>
+          <p:nvPr>
+            <p:ph sz="quarter" idx="13"/>
+          </p:nvPr>
+        </p:nvSpPr>
+        <p:spPr>
+          <a:xfrm>
+            <a:off x="6096000" y="1517904"/>
+            <a:ext cx="5212080" cy="4572000"/>
+          </a:xfrm>
+        </p:spPr>
+        <p:txBody>
+          <a:bodyPr/>
+          <a:lstStyle>
+            <a:lvl1pPr marL="0" indent="0">
+              <a:lnSpc>
+                <a:spcPct val="150000"/>
+              </a:lnSpc>
+              <a:spcBef>
+                <a:spcPts val="0"/>
+              </a:spcBef>
+              <a:spcAft>
+                <a:spcPts val="1000"/>
+              </a:spcAft>
+              <a:buNone/>
+              <a:defRPr sz="2400"/>
+            </a:lvl1pPr>
+            <a:lvl2pPr>
+              <a:defRPr sz="1800"/>
+            </a:lvl2pPr>
+            <a:lvl3pPr>
+              <a:defRPr sz="1800"/>
+            </a:lvl3pPr>
+            <a:lvl4pPr>
+              <a:defRPr sz="1600"/>
+            </a:lvl4pPr>
+            <a:lvl5pPr>
+              <a:defRPr sz="1600"/>
+            </a:lvl5pPr>
+          </a:lstStyle>
+          <a:p>
+            <a:pPr lvl="0"/>
+            <a:r>
+              <a:rPr lang="en-US"/>
+              <a:t>Click to edit Master text styles</a:t>
+            </a:r>
+          </a:p>
+          <a:p>
+            <a:pPr lvl="1"/>
+            <a:r>
+              <a:rPr lang="en-US"/>
+              <a:t>Second level</a:t>
+            </a:r>
+          </a:p>
+          <a:p>
+            <a:pPr lvl="2"/>
+            <a:r>
+              <a:rPr lang="en-US"/>
+              <a:t>Third level</a:t>
+            </a:r>
+          </a:p>
+          <a:p>
+            <a:pPr lvl="3"/>
+            <a:r>
+              <a:rPr lang="en-US"/>
+              <a:t>Fourth level</a:t>
+            </a:r>
+          </a:p>
+          <a:p>
+            <a:pPr lvl="4"/>
+            <a:r>
+              <a:rPr lang="en-US"/>
+              <a:t>Fifth level</a:t>
+            </a:r>
+            <a:endParaRPr lang="en-US" dirty="0"/>
+          </a:p>
+        </p:txBody>
+      </p:sp>
+      <p:sp>
+        <p:nvSpPr>
+          <p:cNvPr id="3" name="Footer Placeholder 2">
+            <a:extLst>
+              <a:ext uri="{FF2B5EF4-FFF2-40B4-BE49-F238E27FC236}">
+                <a16:creationId xmlns:a16="http://schemas.microsoft.com/office/drawing/2014/main" id="{452CFE08-03FE-487B-8963-9FAD3049CFFA}"/>
+              </a:ext>
+            </a:extLst>
+          </p:cNvPr>
+          <p:cNvSpPr>
+            <a:spLocks noGrp="1"/>
+          </p:cNvSpPr>
+          <p:nvPr>
+            <p:ph type="ftr" sz="quarter" idx="11"/>
+          </p:nvPr>
+        </p:nvSpPr>
+        <p:spPr>
+          <a:xfrm>
+            <a:off x="758952" y="6400800"/>
+            <a:ext cx="6099048" cy="365125"/>
+          </a:xfrm>
+          <a:prstGeom prst="rect">
+            <a:avLst/>
+          </a:prstGeom>
+        </p:spPr>
+        <p:txBody>
+          <a:bodyPr/>
+          <a:lstStyle/>
+          <a:p>
+            <a:endParaRPr lang="en-US" dirty="0"/>
+          </a:p>
+        </p:txBody>
+      </p:sp>
+      <p:sp>
+        <p:nvSpPr>
+          <p:cNvPr id="2" name="Date Placeholder 1">
+            <a:extLst>
+              <a:ext uri="{FF2B5EF4-FFF2-40B4-BE49-F238E27FC236}">
+                <a16:creationId xmlns:a16="http://schemas.microsoft.com/office/drawing/2014/main" id="{B7862271-51F6-4122-9709-D279042F8846}"/>
+              </a:ext>
+            </a:extLst>
+          </p:cNvPr>
+          <p:cNvSpPr>
+            <a:spLocks noGrp="1"/>
+          </p:cNvSpPr>
+          <p:nvPr>
+            <p:ph type="dt" sz="half" idx="10"/>
+          </p:nvPr>
+        </p:nvSpPr>
+        <p:spPr/>
+        <p:txBody>
+          <a:bodyPr/>
+          <a:lstStyle/>
+          <a:p>
+            <a:r>
+              <a:rPr lang="en-US" dirty="0"/>
+              <a:t>3/1/20XX</a:t>
+            </a:r>
+          </a:p>
+        </p:txBody>
+      </p:sp>
+      <p:sp>
+        <p:nvSpPr>
+          <p:cNvPr id="4" name="Slide Number Placeholder 3">
+            <a:extLst>
+              <a:ext uri="{FF2B5EF4-FFF2-40B4-BE49-F238E27FC236}">
+                <a16:creationId xmlns:a16="http://schemas.microsoft.com/office/drawing/2014/main" id="{CA935A50-18AE-4CB1-BB10-1CBDD8A7C2C4}"/>
+              </a:ext>
+            </a:extLst>
+          </p:cNvPr>
+          <p:cNvSpPr>
+            <a:spLocks noGrp="1"/>
+          </p:cNvSpPr>
+          <p:nvPr>
+            <p:ph type="sldNum" sz="quarter" idx="12"/>
+          </p:nvPr>
+        </p:nvSpPr>
+        <p:spPr/>
+        <p:txBody>
+          <a:bodyPr/>
+          <a:lstStyle/>
+          <a:p>
+            <a:fld id="{CB1E4CB7-CB13-4810-BF18-BE31AFC64F93}" type="slidenum">
+              <a:rPr lang="en-US" smtClean="0"/>
+              <a:t>‹#›</a:t>
+            </a:fld>
+            <a:endParaRPr lang="en-US" dirty="0"/>
+          </a:p>
+        </p:txBody>
+      </p:sp>
+    </p:spTree>
+    <p:extLst>
+      <p:ext uri="{BB962C8B-B14F-4D97-AF65-F5344CB8AC3E}">
+        <p14:creationId xmlns:p14="http://schemas.microsoft.com/office/powerpoint/2010/main" val="2909613805"/>
+      </p:ext>
+    </p:extLst>
+  </p:cSld>
+  <p:clrMapOvr>
+    <a:masterClrMapping/>
+  </p:clrMapOvr>
+</p:sldLayout>
+</file>
+
+<file path=ppt/slideLayouts/slideLayout2.xml><?xml version="1.0" encoding="utf-8"?>
+<p:sldLayout xmlns:a="http://schemas.openxmlformats.org/drawingml/2006/main" xmlns:r="http://schemas.openxmlformats.org/officeDocument/2006/relationships" xmlns:p="http://schemas.openxmlformats.org/presentationml/2006/main" preserve="1" userDrawn="1">
+  <p:cSld name="Section break with subtitle">
     <p:spTree>
       <p:nvGrpSpPr>
         <p:cNvPr id="1" name=""/>
@@ -966,711 +1396,6 @@
         </p:nvSpPr>
         <p:spPr>
           <a:xfrm>
-            <a:off x="0" y="0"/>
-            <a:ext cx="5334003" cy="6175613"/>
-          </a:xfrm>
-          <a:prstGeom prst="rect">
-            <a:avLst/>
-          </a:prstGeom>
-          <a:ln>
-            <a:noFill/>
-          </a:ln>
-        </p:spPr>
-        <p:style>
-          <a:lnRef idx="2">
-            <a:schemeClr val="accent1">
-              <a:shade val="50000"/>
-            </a:schemeClr>
-          </a:lnRef>
-          <a:fillRef idx="1">
-            <a:schemeClr val="accent1"/>
-          </a:fillRef>
-          <a:effectRef idx="0">
-            <a:schemeClr val="accent1"/>
-          </a:effectRef>
-          <a:fontRef idx="minor">
-            <a:schemeClr val="lt1"/>
-          </a:fontRef>
-        </p:style>
-        <p:txBody>
-          <a:bodyPr rtlCol="0" anchor="ctr"/>
-          <a:lstStyle/>
-          <a:p>
-            <a:pPr algn="ctr"/>
-            <a:endParaRPr lang="en-US" dirty="0"/>
-          </a:p>
-        </p:txBody>
-      </p:sp>
-      <p:sp>
-        <p:nvSpPr>
-          <p:cNvPr id="2" name="Title 1">
-            <a:extLst>
-              <a:ext uri="{FF2B5EF4-FFF2-40B4-BE49-F238E27FC236}">
-                <a16:creationId xmlns:a16="http://schemas.microsoft.com/office/drawing/2014/main" id="{470AF812-9F51-0D2C-2EA5-A8D6DA66275F}"/>
-              </a:ext>
-            </a:extLst>
-          </p:cNvPr>
-          <p:cNvSpPr>
-            <a:spLocks noGrp="1"/>
-          </p:cNvSpPr>
-          <p:nvPr>
-            <p:ph type="title"/>
-          </p:nvPr>
-        </p:nvSpPr>
-        <p:spPr>
-          <a:xfrm>
-            <a:off x="758952" y="841248"/>
-            <a:ext cx="4114800" cy="3474720"/>
-          </a:xfrm>
-        </p:spPr>
-        <p:txBody>
-          <a:bodyPr anchor="ctr">
-            <a:normAutofit/>
-          </a:bodyPr>
-          <a:lstStyle>
-            <a:lvl1pPr>
-              <a:defRPr sz="4400"/>
-            </a:lvl1pPr>
-          </a:lstStyle>
-          <a:p>
-            <a:r>
-              <a:rPr lang="en-US"/>
-              <a:t>Click to edit Master title style</a:t>
-            </a:r>
-            <a:endParaRPr lang="en-US" dirty="0"/>
-          </a:p>
-        </p:txBody>
-      </p:sp>
-      <p:sp>
-        <p:nvSpPr>
-          <p:cNvPr id="9" name="Subtitle 19">
-            <a:extLst>
-              <a:ext uri="{FF2B5EF4-FFF2-40B4-BE49-F238E27FC236}">
-                <a16:creationId xmlns:a16="http://schemas.microsoft.com/office/drawing/2014/main" id="{E8F46CAD-D4FF-4BBC-937E-CBBD034A180B}"/>
-              </a:ext>
-            </a:extLst>
-          </p:cNvPr>
-          <p:cNvSpPr>
-            <a:spLocks noGrp="1"/>
-          </p:cNvSpPr>
-          <p:nvPr>
-            <p:ph type="subTitle" idx="1" hasCustomPrompt="1"/>
-          </p:nvPr>
-        </p:nvSpPr>
-        <p:spPr>
-          <a:xfrm>
-            <a:off x="762000" y="4570807"/>
-            <a:ext cx="4123899" cy="1524000"/>
-          </a:xfrm>
-        </p:spPr>
-        <p:txBody>
-          <a:bodyPr>
-            <a:normAutofit/>
-          </a:bodyPr>
-          <a:lstStyle>
-            <a:lvl1pPr marL="0" indent="0">
-              <a:buNone/>
-              <a:defRPr sz="2400"/>
-            </a:lvl1pPr>
-          </a:lstStyle>
-          <a:p>
-            <a:pPr algn="l"/>
-            <a:r>
-              <a:rPr lang="en-US" dirty="0"/>
-              <a:t>Click to add subtitle</a:t>
-            </a:r>
-          </a:p>
-        </p:txBody>
-      </p:sp>
-      <p:sp>
-        <p:nvSpPr>
-          <p:cNvPr id="15" name="Picture Placeholder 14">
-            <a:extLst>
-              <a:ext uri="{FF2B5EF4-FFF2-40B4-BE49-F238E27FC236}">
-                <a16:creationId xmlns:a16="http://schemas.microsoft.com/office/drawing/2014/main" id="{A2750E7C-D01B-4533-A0B8-2E7EF2B168DC}"/>
-              </a:ext>
-            </a:extLst>
-          </p:cNvPr>
-          <p:cNvSpPr>
-            <a:spLocks noGrp="1"/>
-          </p:cNvSpPr>
-          <p:nvPr>
-            <p:ph type="pic" sz="quarter" idx="13"/>
-          </p:nvPr>
-        </p:nvSpPr>
-        <p:spPr>
-          <a:xfrm>
-            <a:off x="5330952" y="754711"/>
-            <a:ext cx="6099048" cy="5340096"/>
-          </a:xfrm>
-          <a:solidFill>
-            <a:schemeClr val="accent6"/>
-          </a:solidFill>
-        </p:spPr>
-        <p:txBody>
-          <a:bodyPr/>
-          <a:lstStyle/>
-          <a:p>
-            <a:r>
-              <a:rPr lang="en-US"/>
-              <a:t>Click icon to add picture</a:t>
-            </a:r>
-            <a:endParaRPr lang="en-US" dirty="0"/>
-          </a:p>
-        </p:txBody>
-      </p:sp>
-    </p:spTree>
-    <p:extLst>
-      <p:ext uri="{BB962C8B-B14F-4D97-AF65-F5344CB8AC3E}">
-        <p14:creationId xmlns:p14="http://schemas.microsoft.com/office/powerpoint/2010/main" val="1772737955"/>
-      </p:ext>
-    </p:extLst>
-  </p:cSld>
-  <p:clrMapOvr>
-    <a:masterClrMapping/>
-  </p:clrMapOvr>
-</p:sldLayout>
-</file>
-
-<file path=ppt/slideLayouts/slideLayout2.xml><?xml version="1.0" encoding="utf-8"?>
-<p:sldLayout xmlns:a="http://schemas.openxmlformats.org/drawingml/2006/main" xmlns:r="http://schemas.openxmlformats.org/officeDocument/2006/relationships" xmlns:p="http://schemas.openxmlformats.org/presentationml/2006/main" preserve="1" userDrawn="1">
-  <p:cSld name="Agenda">
-    <p:spTree>
-      <p:nvGrpSpPr>
-        <p:cNvPr id="1" name=""/>
-        <p:cNvGrpSpPr/>
-        <p:nvPr/>
-      </p:nvGrpSpPr>
-      <p:grpSpPr>
-        <a:xfrm>
-          <a:off x="0" y="0"/>
-          <a:ext cx="0" cy="0"/>
-          <a:chOff x="0" y="0"/>
-          <a:chExt cx="0" cy="0"/>
-        </a:xfrm>
-      </p:grpSpPr>
-      <p:sp useBgFill="1">
-        <p:nvSpPr>
-          <p:cNvPr id="5" name="Rectangle 4">
-            <a:extLst>
-              <a:ext uri="{FF2B5EF4-FFF2-40B4-BE49-F238E27FC236}">
-                <a16:creationId xmlns:a16="http://schemas.microsoft.com/office/drawing/2014/main" id="{FAC5ABB9-3EAC-446C-B128-CFDB09B2476A}"/>
-              </a:ext>
-              <a:ext uri="{C183D7F6-B498-43B3-948B-1728B52AA6E4}">
-                <adec:decorative xmlns:adec="http://schemas.microsoft.com/office/drawing/2017/decorative" val="1"/>
-              </a:ext>
-            </a:extLst>
-          </p:cNvPr>
-          <p:cNvSpPr/>
-          <p:nvPr userDrawn="1"/>
-        </p:nvSpPr>
-        <p:spPr>
-          <a:xfrm>
-            <a:off x="0" y="2"/>
-            <a:ext cx="12192000" cy="6858000"/>
-          </a:xfrm>
-          <a:prstGeom prst="rect">
-            <a:avLst/>
-          </a:prstGeom>
-          <a:ln>
-            <a:noFill/>
-          </a:ln>
-        </p:spPr>
-        <p:style>
-          <a:lnRef idx="2">
-            <a:schemeClr val="accent1">
-              <a:shade val="50000"/>
-            </a:schemeClr>
-          </a:lnRef>
-          <a:fillRef idx="1">
-            <a:schemeClr val="accent1"/>
-          </a:fillRef>
-          <a:effectRef idx="0">
-            <a:schemeClr val="accent1"/>
-          </a:effectRef>
-          <a:fontRef idx="minor">
-            <a:schemeClr val="lt1"/>
-          </a:fontRef>
-        </p:style>
-        <p:txBody>
-          <a:bodyPr rtlCol="0" anchor="ctr"/>
-          <a:lstStyle/>
-          <a:p>
-            <a:pPr algn="ctr"/>
-            <a:endParaRPr lang="en-US" dirty="0"/>
-          </a:p>
-        </p:txBody>
-      </p:sp>
-      <p:sp>
-        <p:nvSpPr>
-          <p:cNvPr id="6" name="Rectangle 5">
-            <a:extLst>
-              <a:ext uri="{FF2B5EF4-FFF2-40B4-BE49-F238E27FC236}">
-                <a16:creationId xmlns:a16="http://schemas.microsoft.com/office/drawing/2014/main" id="{70DED2D7-7BC9-473D-8241-8289B5821CF4}"/>
-              </a:ext>
-              <a:ext uri="{C183D7F6-B498-43B3-948B-1728B52AA6E4}">
-                <adec:decorative xmlns:adec="http://schemas.microsoft.com/office/drawing/2017/decorative" val="1"/>
-              </a:ext>
-            </a:extLst>
-          </p:cNvPr>
-          <p:cNvSpPr/>
-          <p:nvPr userDrawn="1"/>
-        </p:nvSpPr>
-        <p:spPr>
-          <a:xfrm>
-            <a:off x="0" y="0"/>
-            <a:ext cx="12192000" cy="6858001"/>
-          </a:xfrm>
-          <a:prstGeom prst="rect">
-            <a:avLst/>
-          </a:prstGeom>
-          <a:gradFill flip="none" rotWithShape="1">
-            <a:gsLst>
-              <a:gs pos="10000">
-                <a:schemeClr val="accent5"/>
-              </a:gs>
-              <a:gs pos="90000">
-                <a:schemeClr val="accent1"/>
-              </a:gs>
-              <a:gs pos="70000">
-                <a:schemeClr val="accent2"/>
-              </a:gs>
-              <a:gs pos="30000">
-                <a:schemeClr val="accent4"/>
-              </a:gs>
-              <a:gs pos="50000">
-                <a:schemeClr val="accent3">
-                  <a:lumMod val="60000"/>
-                  <a:lumOff val="40000"/>
-                </a:schemeClr>
-              </a:gs>
-            </a:gsLst>
-            <a:lin ang="7200000" scaled="0"/>
-            <a:tileRect/>
-          </a:gradFill>
-          <a:ln>
-            <a:noFill/>
-          </a:ln>
-        </p:spPr>
-        <p:style>
-          <a:lnRef idx="2">
-            <a:schemeClr val="accent1">
-              <a:shade val="50000"/>
-            </a:schemeClr>
-          </a:lnRef>
-          <a:fillRef idx="1">
-            <a:schemeClr val="accent1"/>
-          </a:fillRef>
-          <a:effectRef idx="0">
-            <a:schemeClr val="accent1"/>
-          </a:effectRef>
-          <a:fontRef idx="minor">
-            <a:schemeClr val="lt1"/>
-          </a:fontRef>
-        </p:style>
-        <p:txBody>
-          <a:bodyPr rtlCol="0" anchor="ctr"/>
-          <a:lstStyle/>
-          <a:p>
-            <a:pPr algn="ctr"/>
-            <a:endParaRPr lang="en-US" dirty="0"/>
-          </a:p>
-        </p:txBody>
-      </p:sp>
-      <p:sp useBgFill="1">
-        <p:nvSpPr>
-          <p:cNvPr id="7" name="Rectangle 6">
-            <a:extLst>
-              <a:ext uri="{FF2B5EF4-FFF2-40B4-BE49-F238E27FC236}">
-                <a16:creationId xmlns:a16="http://schemas.microsoft.com/office/drawing/2014/main" id="{19C2616F-4436-4A60-BB08-54EC762C53BE}"/>
-              </a:ext>
-              <a:ext uri="{C183D7F6-B498-43B3-948B-1728B52AA6E4}">
-                <adec:decorative xmlns:adec="http://schemas.microsoft.com/office/drawing/2017/decorative" val="1"/>
-              </a:ext>
-            </a:extLst>
-          </p:cNvPr>
-          <p:cNvSpPr/>
-          <p:nvPr userDrawn="1"/>
-        </p:nvSpPr>
-        <p:spPr>
-          <a:xfrm>
-            <a:off x="0" y="762001"/>
-            <a:ext cx="12192000" cy="6095999"/>
-          </a:xfrm>
-          <a:prstGeom prst="rect">
-            <a:avLst/>
-          </a:prstGeom>
-          <a:ln w="76200">
-            <a:noFill/>
-          </a:ln>
-        </p:spPr>
-        <p:style>
-          <a:lnRef idx="2">
-            <a:schemeClr val="accent1">
-              <a:shade val="50000"/>
-            </a:schemeClr>
-          </a:lnRef>
-          <a:fillRef idx="1">
-            <a:schemeClr val="accent1"/>
-          </a:fillRef>
-          <a:effectRef idx="0">
-            <a:schemeClr val="accent1"/>
-          </a:effectRef>
-          <a:fontRef idx="minor">
-            <a:schemeClr val="lt1"/>
-          </a:fontRef>
-        </p:style>
-        <p:txBody>
-          <a:bodyPr rtlCol="0" anchor="ctr"/>
-          <a:lstStyle/>
-          <a:p>
-            <a:pPr algn="ctr"/>
-            <a:endParaRPr lang="en-US" dirty="0"/>
-          </a:p>
-        </p:txBody>
-      </p:sp>
-      <p:sp>
-        <p:nvSpPr>
-          <p:cNvPr id="9" name="Title 8">
-            <a:extLst>
-              <a:ext uri="{FF2B5EF4-FFF2-40B4-BE49-F238E27FC236}">
-                <a16:creationId xmlns:a16="http://schemas.microsoft.com/office/drawing/2014/main" id="{62A5B690-D47A-166B-0BEE-8CDC1BB59826}"/>
-              </a:ext>
-            </a:extLst>
-          </p:cNvPr>
-          <p:cNvSpPr>
-            <a:spLocks noGrp="1"/>
-          </p:cNvSpPr>
-          <p:nvPr>
-            <p:ph type="title"/>
-          </p:nvPr>
-        </p:nvSpPr>
-        <p:spPr>
-          <a:xfrm>
-            <a:off x="758952" y="1517904"/>
-            <a:ext cx="4114800" cy="4572000"/>
-          </a:xfrm>
-        </p:spPr>
-        <p:txBody>
-          <a:bodyPr>
-            <a:normAutofit/>
-          </a:bodyPr>
-          <a:lstStyle>
-            <a:lvl1pPr>
-              <a:defRPr sz="3200"/>
-            </a:lvl1pPr>
-          </a:lstStyle>
-          <a:p>
-            <a:r>
-              <a:rPr lang="en-US"/>
-              <a:t>Click to edit Master title style</a:t>
-            </a:r>
-            <a:endParaRPr lang="en-US" dirty="0"/>
-          </a:p>
-        </p:txBody>
-      </p:sp>
-      <p:sp>
-        <p:nvSpPr>
-          <p:cNvPr id="11" name="Content Placeholder 10">
-            <a:extLst>
-              <a:ext uri="{FF2B5EF4-FFF2-40B4-BE49-F238E27FC236}">
-                <a16:creationId xmlns:a16="http://schemas.microsoft.com/office/drawing/2014/main" id="{D99B7A4E-1E73-5148-8EF4-5232DBEAFE0B}"/>
-              </a:ext>
-            </a:extLst>
-          </p:cNvPr>
-          <p:cNvSpPr>
-            <a:spLocks noGrp="1"/>
-          </p:cNvSpPr>
-          <p:nvPr>
-            <p:ph sz="quarter" idx="13"/>
-          </p:nvPr>
-        </p:nvSpPr>
-        <p:spPr>
-          <a:xfrm>
-            <a:off x="6096000" y="1517904"/>
-            <a:ext cx="5212080" cy="4572000"/>
-          </a:xfrm>
-        </p:spPr>
-        <p:txBody>
-          <a:bodyPr/>
-          <a:lstStyle>
-            <a:lvl1pPr marL="0" indent="0">
-              <a:lnSpc>
-                <a:spcPct val="150000"/>
-              </a:lnSpc>
-              <a:spcBef>
-                <a:spcPts val="0"/>
-              </a:spcBef>
-              <a:spcAft>
-                <a:spcPts val="1000"/>
-              </a:spcAft>
-              <a:buNone/>
-              <a:defRPr sz="2400"/>
-            </a:lvl1pPr>
-            <a:lvl2pPr>
-              <a:defRPr sz="1800"/>
-            </a:lvl2pPr>
-            <a:lvl3pPr>
-              <a:defRPr sz="1800"/>
-            </a:lvl3pPr>
-            <a:lvl4pPr>
-              <a:defRPr sz="1600"/>
-            </a:lvl4pPr>
-            <a:lvl5pPr>
-              <a:defRPr sz="1600"/>
-            </a:lvl5pPr>
-          </a:lstStyle>
-          <a:p>
-            <a:pPr lvl="0"/>
-            <a:r>
-              <a:rPr lang="en-US"/>
-              <a:t>Click to edit Master text styles</a:t>
-            </a:r>
-          </a:p>
-          <a:p>
-            <a:pPr lvl="1"/>
-            <a:r>
-              <a:rPr lang="en-US"/>
-              <a:t>Second level</a:t>
-            </a:r>
-          </a:p>
-          <a:p>
-            <a:pPr lvl="2"/>
-            <a:r>
-              <a:rPr lang="en-US"/>
-              <a:t>Third level</a:t>
-            </a:r>
-          </a:p>
-          <a:p>
-            <a:pPr lvl="3"/>
-            <a:r>
-              <a:rPr lang="en-US"/>
-              <a:t>Fourth level</a:t>
-            </a:r>
-          </a:p>
-          <a:p>
-            <a:pPr lvl="4"/>
-            <a:r>
-              <a:rPr lang="en-US"/>
-              <a:t>Fifth level</a:t>
-            </a:r>
-            <a:endParaRPr lang="en-US" dirty="0"/>
-          </a:p>
-        </p:txBody>
-      </p:sp>
-      <p:sp>
-        <p:nvSpPr>
-          <p:cNvPr id="3" name="Footer Placeholder 2">
-            <a:extLst>
-              <a:ext uri="{FF2B5EF4-FFF2-40B4-BE49-F238E27FC236}">
-                <a16:creationId xmlns:a16="http://schemas.microsoft.com/office/drawing/2014/main" id="{452CFE08-03FE-487B-8963-9FAD3049CFFA}"/>
-              </a:ext>
-            </a:extLst>
-          </p:cNvPr>
-          <p:cNvSpPr>
-            <a:spLocks noGrp="1"/>
-          </p:cNvSpPr>
-          <p:nvPr>
-            <p:ph type="ftr" sz="quarter" idx="11"/>
-          </p:nvPr>
-        </p:nvSpPr>
-        <p:spPr>
-          <a:xfrm>
-            <a:off x="758952" y="6400800"/>
-            <a:ext cx="6099048" cy="365125"/>
-          </a:xfrm>
-          <a:prstGeom prst="rect">
-            <a:avLst/>
-          </a:prstGeom>
-        </p:spPr>
-        <p:txBody>
-          <a:bodyPr/>
-          <a:lstStyle/>
-          <a:p>
-            <a:endParaRPr lang="en-US" dirty="0"/>
-          </a:p>
-        </p:txBody>
-      </p:sp>
-      <p:sp>
-        <p:nvSpPr>
-          <p:cNvPr id="2" name="Date Placeholder 1">
-            <a:extLst>
-              <a:ext uri="{FF2B5EF4-FFF2-40B4-BE49-F238E27FC236}">
-                <a16:creationId xmlns:a16="http://schemas.microsoft.com/office/drawing/2014/main" id="{B7862271-51F6-4122-9709-D279042F8846}"/>
-              </a:ext>
-            </a:extLst>
-          </p:cNvPr>
-          <p:cNvSpPr>
-            <a:spLocks noGrp="1"/>
-          </p:cNvSpPr>
-          <p:nvPr>
-            <p:ph type="dt" sz="half" idx="10"/>
-          </p:nvPr>
-        </p:nvSpPr>
-        <p:spPr/>
-        <p:txBody>
-          <a:bodyPr/>
-          <a:lstStyle/>
-          <a:p>
-            <a:r>
-              <a:rPr lang="en-US" dirty="0"/>
-              <a:t>3/1/20XX</a:t>
-            </a:r>
-          </a:p>
-        </p:txBody>
-      </p:sp>
-      <p:sp>
-        <p:nvSpPr>
-          <p:cNvPr id="4" name="Slide Number Placeholder 3">
-            <a:extLst>
-              <a:ext uri="{FF2B5EF4-FFF2-40B4-BE49-F238E27FC236}">
-                <a16:creationId xmlns:a16="http://schemas.microsoft.com/office/drawing/2014/main" id="{CA935A50-18AE-4CB1-BB10-1CBDD8A7C2C4}"/>
-              </a:ext>
-            </a:extLst>
-          </p:cNvPr>
-          <p:cNvSpPr>
-            <a:spLocks noGrp="1"/>
-          </p:cNvSpPr>
-          <p:nvPr>
-            <p:ph type="sldNum" sz="quarter" idx="12"/>
-          </p:nvPr>
-        </p:nvSpPr>
-        <p:spPr/>
-        <p:txBody>
-          <a:bodyPr/>
-          <a:lstStyle/>
-          <a:p>
-            <a:fld id="{CB1E4CB7-CB13-4810-BF18-BE31AFC64F93}" type="slidenum">
-              <a:rPr lang="en-US" smtClean="0"/>
-              <a:t>‹#›</a:t>
-            </a:fld>
-            <a:endParaRPr lang="en-US" dirty="0"/>
-          </a:p>
-        </p:txBody>
-      </p:sp>
-    </p:spTree>
-    <p:extLst>
-      <p:ext uri="{BB962C8B-B14F-4D97-AF65-F5344CB8AC3E}">
-        <p14:creationId xmlns:p14="http://schemas.microsoft.com/office/powerpoint/2010/main" val="2909613805"/>
-      </p:ext>
-    </p:extLst>
-  </p:cSld>
-  <p:clrMapOvr>
-    <a:masterClrMapping/>
-  </p:clrMapOvr>
-</p:sldLayout>
-</file>
-
-<file path=ppt/slideLayouts/slideLayout3.xml><?xml version="1.0" encoding="utf-8"?>
-<p:sldLayout xmlns:a="http://schemas.openxmlformats.org/drawingml/2006/main" xmlns:r="http://schemas.openxmlformats.org/officeDocument/2006/relationships" xmlns:p="http://schemas.openxmlformats.org/presentationml/2006/main" preserve="1" userDrawn="1">
-  <p:cSld name="Section break with subtitle">
-    <p:spTree>
-      <p:nvGrpSpPr>
-        <p:cNvPr id="1" name=""/>
-        <p:cNvGrpSpPr/>
-        <p:nvPr/>
-      </p:nvGrpSpPr>
-      <p:grpSpPr>
-        <a:xfrm>
-          <a:off x="0" y="0"/>
-          <a:ext cx="0" cy="0"/>
-          <a:chOff x="0" y="0"/>
-          <a:chExt cx="0" cy="0"/>
-        </a:xfrm>
-      </p:grpSpPr>
-      <p:sp>
-        <p:nvSpPr>
-          <p:cNvPr id="6" name="Rectangle 5">
-            <a:extLst>
-              <a:ext uri="{FF2B5EF4-FFF2-40B4-BE49-F238E27FC236}">
-                <a16:creationId xmlns:a16="http://schemas.microsoft.com/office/drawing/2014/main" id="{751A4182-6276-41ED-8EAF-0C6A4D8FF0A8}"/>
-              </a:ext>
-              <a:ext uri="{C183D7F6-B498-43B3-948B-1728B52AA6E4}">
-                <adec:decorative xmlns:adec="http://schemas.microsoft.com/office/drawing/2017/decorative" val="1"/>
-              </a:ext>
-            </a:extLst>
-          </p:cNvPr>
-          <p:cNvSpPr/>
-          <p:nvPr userDrawn="1"/>
-        </p:nvSpPr>
-        <p:spPr>
-          <a:xfrm>
-            <a:off x="0" y="0"/>
-            <a:ext cx="12192000" cy="6099048"/>
-          </a:xfrm>
-          <a:prstGeom prst="rect">
-            <a:avLst/>
-          </a:prstGeom>
-          <a:gradFill flip="none" rotWithShape="1">
-            <a:gsLst>
-              <a:gs pos="10000">
-                <a:schemeClr val="accent5"/>
-              </a:gs>
-              <a:gs pos="90000">
-                <a:schemeClr val="accent1"/>
-              </a:gs>
-              <a:gs pos="70000">
-                <a:schemeClr val="accent2"/>
-              </a:gs>
-              <a:gs pos="30000">
-                <a:schemeClr val="accent4"/>
-              </a:gs>
-              <a:gs pos="50000">
-                <a:schemeClr val="accent3">
-                  <a:lumMod val="60000"/>
-                  <a:lumOff val="40000"/>
-                </a:schemeClr>
-              </a:gs>
-            </a:gsLst>
-            <a:lin ang="7200000" scaled="0"/>
-            <a:tileRect/>
-          </a:gradFill>
-          <a:ln>
-            <a:noFill/>
-          </a:ln>
-        </p:spPr>
-        <p:style>
-          <a:lnRef idx="2">
-            <a:schemeClr val="accent1">
-              <a:shade val="50000"/>
-            </a:schemeClr>
-          </a:lnRef>
-          <a:fillRef idx="1">
-            <a:schemeClr val="accent1"/>
-          </a:fillRef>
-          <a:effectRef idx="0">
-            <a:schemeClr val="accent1"/>
-          </a:effectRef>
-          <a:fontRef idx="minor">
-            <a:schemeClr val="lt1"/>
-          </a:fontRef>
-        </p:style>
-        <p:txBody>
-          <a:bodyPr rtlCol="0" anchor="ctr"/>
-          <a:lstStyle/>
-          <a:p>
-            <a:pPr algn="ctr"/>
-            <a:endParaRPr lang="en-US" dirty="0"/>
-          </a:p>
-        </p:txBody>
-      </p:sp>
-      <p:sp useBgFill="1">
-        <p:nvSpPr>
-          <p:cNvPr id="7" name="Rectangle 6">
-            <a:extLst>
-              <a:ext uri="{FF2B5EF4-FFF2-40B4-BE49-F238E27FC236}">
-                <a16:creationId xmlns:a16="http://schemas.microsoft.com/office/drawing/2014/main" id="{EF4B644F-A23D-409C-9540-B41AC18DB546}"/>
-              </a:ext>
-              <a:ext uri="{C183D7F6-B498-43B3-948B-1728B52AA6E4}">
-                <adec:decorative xmlns:adec="http://schemas.microsoft.com/office/drawing/2017/decorative" val="1"/>
-              </a:ext>
-            </a:extLst>
-          </p:cNvPr>
-          <p:cNvSpPr/>
-          <p:nvPr userDrawn="1"/>
-        </p:nvSpPr>
-        <p:spPr>
-          <a:xfrm>
             <a:off x="6857997" y="0"/>
             <a:ext cx="5334003" cy="6175613"/>
           </a:xfrm>
@@ -1836,7 +1561,7 @@
 </p:sldLayout>
 </file>
 
-<file path=ppt/slideLayouts/slideLayout4.xml><?xml version="1.0" encoding="utf-8"?>
+<file path=ppt/slideLayouts/slideLayout3.xml><?xml version="1.0" encoding="utf-8"?>
 <p:sldLayout xmlns:a="http://schemas.openxmlformats.org/drawingml/2006/main" xmlns:r="http://schemas.openxmlformats.org/officeDocument/2006/relationships" xmlns:p="http://schemas.openxmlformats.org/presentationml/2006/main" preserve="1" userDrawn="1">
   <p:cSld name="Section break with subtitle 2">
     <p:spTree>
@@ -2139,7 +1864,7 @@
 </p:sldLayout>
 </file>
 
-<file path=ppt/slideLayouts/slideLayout5.xml><?xml version="1.0" encoding="utf-8"?>
+<file path=ppt/slideLayouts/slideLayout4.xml><?xml version="1.0" encoding="utf-8"?>
 <p:sldLayout xmlns:a="http://schemas.openxmlformats.org/drawingml/2006/main" xmlns:r="http://schemas.openxmlformats.org/officeDocument/2006/relationships" xmlns:p="http://schemas.openxmlformats.org/presentationml/2006/main" preserve="1" userDrawn="1">
   <p:cSld name="Title, content, and picture">
     <p:spTree>
@@ -2658,329 +2383,7 @@
 </p:sldLayout>
 </file>
 
-<file path=ppt/slideLayouts/slideLayout6.xml><?xml version="1.0" encoding="utf-8"?>
-<p:sldLayout xmlns:a="http://schemas.openxmlformats.org/drawingml/2006/main" xmlns:r="http://schemas.openxmlformats.org/officeDocument/2006/relationships" xmlns:p="http://schemas.openxmlformats.org/presentationml/2006/main" userDrawn="1">
-  <p:cSld name="Two column">
-    <p:spTree>
-      <p:nvGrpSpPr>
-        <p:cNvPr id="1" name=""/>
-        <p:cNvGrpSpPr/>
-        <p:nvPr/>
-      </p:nvGrpSpPr>
-      <p:grpSpPr>
-        <a:xfrm>
-          <a:off x="0" y="0"/>
-          <a:ext cx="0" cy="0"/>
-          <a:chOff x="0" y="0"/>
-          <a:chExt cx="0" cy="0"/>
-        </a:xfrm>
-      </p:grpSpPr>
-      <p:sp>
-        <p:nvSpPr>
-          <p:cNvPr id="10" name="Title 9">
-            <a:extLst>
-              <a:ext uri="{FF2B5EF4-FFF2-40B4-BE49-F238E27FC236}">
-                <a16:creationId xmlns:a16="http://schemas.microsoft.com/office/drawing/2014/main" id="{D9D22302-83E3-4E22-93DF-1E5D463B64C3}"/>
-              </a:ext>
-            </a:extLst>
-          </p:cNvPr>
-          <p:cNvSpPr>
-            <a:spLocks noGrp="1"/>
-          </p:cNvSpPr>
-          <p:nvPr>
-            <p:ph type="title"/>
-          </p:nvPr>
-        </p:nvSpPr>
-        <p:spPr>
-          <a:xfrm>
-            <a:off x="1517904" y="1517904"/>
-            <a:ext cx="9144000" cy="1280160"/>
-          </a:xfrm>
-        </p:spPr>
-        <p:txBody>
-          <a:bodyPr>
-            <a:normAutofit/>
-          </a:bodyPr>
-          <a:lstStyle>
-            <a:lvl1pPr>
-              <a:defRPr sz="3200"/>
-            </a:lvl1pPr>
-          </a:lstStyle>
-          <a:p>
-            <a:r>
-              <a:rPr lang="en-US"/>
-              <a:t>Click to edit Master title style</a:t>
-            </a:r>
-            <a:endParaRPr lang="en-US" dirty="0"/>
-          </a:p>
-        </p:txBody>
-      </p:sp>
-      <p:sp>
-        <p:nvSpPr>
-          <p:cNvPr id="2" name="Content Placeholder 5">
-            <a:extLst>
-              <a:ext uri="{FF2B5EF4-FFF2-40B4-BE49-F238E27FC236}">
-                <a16:creationId xmlns:a16="http://schemas.microsoft.com/office/drawing/2014/main" id="{56DDD407-AEC1-3D37-ADE9-45D0416B2084}"/>
-              </a:ext>
-            </a:extLst>
-          </p:cNvPr>
-          <p:cNvSpPr>
-            <a:spLocks noGrp="1"/>
-          </p:cNvSpPr>
-          <p:nvPr>
-            <p:ph sz="quarter" idx="14"/>
-          </p:nvPr>
-        </p:nvSpPr>
-        <p:spPr>
-          <a:xfrm>
-            <a:off x="1517904" y="3108960"/>
-            <a:ext cx="4334256" cy="3017520"/>
-          </a:xfrm>
-        </p:spPr>
-        <p:txBody>
-          <a:bodyPr>
-            <a:normAutofit/>
-          </a:bodyPr>
-          <a:lstStyle>
-            <a:lvl1pPr>
-              <a:defRPr sz="1800"/>
-            </a:lvl1pPr>
-            <a:lvl2pPr>
-              <a:defRPr sz="1400"/>
-            </a:lvl2pPr>
-            <a:lvl3pPr>
-              <a:defRPr sz="1400"/>
-            </a:lvl3pPr>
-            <a:lvl4pPr>
-              <a:defRPr sz="1200"/>
-            </a:lvl4pPr>
-            <a:lvl5pPr>
-              <a:defRPr sz="1200"/>
-            </a:lvl5pPr>
-          </a:lstStyle>
-          <a:p>
-            <a:pPr lvl="0"/>
-            <a:r>
-              <a:rPr lang="en-US"/>
-              <a:t>Click to edit Master text styles</a:t>
-            </a:r>
-          </a:p>
-          <a:p>
-            <a:pPr lvl="1"/>
-            <a:r>
-              <a:rPr lang="en-US"/>
-              <a:t>Second level</a:t>
-            </a:r>
-          </a:p>
-          <a:p>
-            <a:pPr lvl="2"/>
-            <a:r>
-              <a:rPr lang="en-US"/>
-              <a:t>Third level</a:t>
-            </a:r>
-          </a:p>
-          <a:p>
-            <a:pPr lvl="3"/>
-            <a:r>
-              <a:rPr lang="en-US"/>
-              <a:t>Fourth level</a:t>
-            </a:r>
-          </a:p>
-          <a:p>
-            <a:pPr lvl="4"/>
-            <a:r>
-              <a:rPr lang="en-US"/>
-              <a:t>Fifth level</a:t>
-            </a:r>
-            <a:endParaRPr lang="en-US" dirty="0"/>
-          </a:p>
-        </p:txBody>
-      </p:sp>
-      <p:sp>
-        <p:nvSpPr>
-          <p:cNvPr id="11" name="Content Placeholder 5">
-            <a:extLst>
-              <a:ext uri="{FF2B5EF4-FFF2-40B4-BE49-F238E27FC236}">
-                <a16:creationId xmlns:a16="http://schemas.microsoft.com/office/drawing/2014/main" id="{6200E1C4-7A2D-07AE-8DB0-52CEF088A187}"/>
-              </a:ext>
-            </a:extLst>
-          </p:cNvPr>
-          <p:cNvSpPr>
-            <a:spLocks noGrp="1"/>
-          </p:cNvSpPr>
-          <p:nvPr>
-            <p:ph sz="quarter" idx="15"/>
-          </p:nvPr>
-        </p:nvSpPr>
-        <p:spPr>
-          <a:xfrm>
-            <a:off x="6336792" y="3108960"/>
-            <a:ext cx="4334256" cy="3017520"/>
-          </a:xfrm>
-        </p:spPr>
-        <p:txBody>
-          <a:bodyPr>
-            <a:normAutofit/>
-          </a:bodyPr>
-          <a:lstStyle>
-            <a:lvl1pPr>
-              <a:defRPr sz="1800"/>
-            </a:lvl1pPr>
-            <a:lvl2pPr>
-              <a:defRPr sz="1400"/>
-            </a:lvl2pPr>
-            <a:lvl3pPr>
-              <a:defRPr sz="1400"/>
-            </a:lvl3pPr>
-            <a:lvl4pPr>
-              <a:defRPr sz="1200"/>
-            </a:lvl4pPr>
-            <a:lvl5pPr>
-              <a:defRPr sz="1200"/>
-            </a:lvl5pPr>
-          </a:lstStyle>
-          <a:p>
-            <a:pPr lvl="0"/>
-            <a:r>
-              <a:rPr lang="en-US"/>
-              <a:t>Click to edit Master text styles</a:t>
-            </a:r>
-          </a:p>
-          <a:p>
-            <a:pPr lvl="1"/>
-            <a:r>
-              <a:rPr lang="en-US"/>
-              <a:t>Second level</a:t>
-            </a:r>
-          </a:p>
-          <a:p>
-            <a:pPr lvl="2"/>
-            <a:r>
-              <a:rPr lang="en-US"/>
-              <a:t>Third level</a:t>
-            </a:r>
-          </a:p>
-          <a:p>
-            <a:pPr lvl="3"/>
-            <a:r>
-              <a:rPr lang="en-US"/>
-              <a:t>Fourth level</a:t>
-            </a:r>
-          </a:p>
-          <a:p>
-            <a:pPr lvl="4"/>
-            <a:r>
-              <a:rPr lang="en-US"/>
-              <a:t>Fifth level</a:t>
-            </a:r>
-            <a:endParaRPr lang="en-US" dirty="0"/>
-          </a:p>
-        </p:txBody>
-      </p:sp>
-      <p:sp>
-        <p:nvSpPr>
-          <p:cNvPr id="8" name="Footer Placeholder 7">
-            <a:extLst>
-              <a:ext uri="{FF2B5EF4-FFF2-40B4-BE49-F238E27FC236}">
-                <a16:creationId xmlns:a16="http://schemas.microsoft.com/office/drawing/2014/main" id="{576AF721-83FE-4B57-B910-C395D23FDE31}"/>
-              </a:ext>
-            </a:extLst>
-          </p:cNvPr>
-          <p:cNvSpPr>
-            <a:spLocks noGrp="1"/>
-          </p:cNvSpPr>
-          <p:nvPr>
-            <p:ph type="ftr" sz="quarter" idx="11"/>
-          </p:nvPr>
-        </p:nvSpPr>
-        <p:spPr>
-          <a:xfrm>
-            <a:off x="758952" y="6400800"/>
-            <a:ext cx="6099048" cy="365125"/>
-          </a:xfrm>
-          <a:prstGeom prst="rect">
-            <a:avLst/>
-          </a:prstGeom>
-        </p:spPr>
-        <p:txBody>
-          <a:bodyPr/>
-          <a:lstStyle/>
-          <a:p>
-            <a:endParaRPr lang="en-US" dirty="0"/>
-          </a:p>
-        </p:txBody>
-      </p:sp>
-      <p:sp>
-        <p:nvSpPr>
-          <p:cNvPr id="7" name="Date Placeholder 6">
-            <a:extLst>
-              <a:ext uri="{FF2B5EF4-FFF2-40B4-BE49-F238E27FC236}">
-                <a16:creationId xmlns:a16="http://schemas.microsoft.com/office/drawing/2014/main" id="{7F3A70F0-5AFA-4C5A-812B-220C6A38DB6B}"/>
-              </a:ext>
-            </a:extLst>
-          </p:cNvPr>
-          <p:cNvSpPr>
-            <a:spLocks noGrp="1"/>
-          </p:cNvSpPr>
-          <p:nvPr>
-            <p:ph type="dt" sz="half" idx="10"/>
-          </p:nvPr>
-        </p:nvSpPr>
-        <p:spPr/>
-        <p:txBody>
-          <a:bodyPr/>
-          <a:lstStyle/>
-          <a:p>
-            <a:r>
-              <a:rPr lang="en-US" dirty="0"/>
-              <a:t>3/1/20XX</a:t>
-            </a:r>
-          </a:p>
-        </p:txBody>
-      </p:sp>
-      <p:sp>
-        <p:nvSpPr>
-          <p:cNvPr id="9" name="Slide Number Placeholder 8">
-            <a:extLst>
-              <a:ext uri="{FF2B5EF4-FFF2-40B4-BE49-F238E27FC236}">
-                <a16:creationId xmlns:a16="http://schemas.microsoft.com/office/drawing/2014/main" id="{556A5893-52F1-44A1-AE8E-CF094DB41CFA}"/>
-              </a:ext>
-            </a:extLst>
-          </p:cNvPr>
-          <p:cNvSpPr>
-            <a:spLocks noGrp="1"/>
-          </p:cNvSpPr>
-          <p:nvPr>
-            <p:ph type="sldNum" sz="quarter" idx="12"/>
-          </p:nvPr>
-        </p:nvSpPr>
-        <p:spPr/>
-        <p:txBody>
-          <a:bodyPr/>
-          <a:lstStyle/>
-          <a:p>
-            <a:fld id="{CB1E4CB7-CB13-4810-BF18-BE31AFC64F93}" type="slidenum">
-              <a:rPr lang="en-US" smtClean="0"/>
-              <a:t>‹#›</a:t>
-            </a:fld>
-            <a:endParaRPr lang="en-US" dirty="0"/>
-          </a:p>
-        </p:txBody>
-      </p:sp>
-    </p:spTree>
-    <p:extLst>
-      <p:ext uri="{BB962C8B-B14F-4D97-AF65-F5344CB8AC3E}">
-        <p14:creationId xmlns:p14="http://schemas.microsoft.com/office/powerpoint/2010/main" val="2091021130"/>
-      </p:ext>
-    </p:extLst>
-  </p:cSld>
-  <p:clrMapOvr>
-    <a:masterClrMapping/>
-  </p:clrMapOvr>
-</p:sldLayout>
-</file>
-
-<file path=ppt/slideLayouts/slideLayout7.xml><?xml version="1.0" encoding="utf-8"?>
+<file path=ppt/slideLayouts/slideLayout5.xml><?xml version="1.0" encoding="utf-8"?>
 <p:sldLayout xmlns:a="http://schemas.openxmlformats.org/drawingml/2006/main" xmlns:r="http://schemas.openxmlformats.org/officeDocument/2006/relationships" xmlns:p="http://schemas.openxmlformats.org/presentationml/2006/main" showMasterSp="0" preserve="1" userDrawn="1">
   <p:cSld name="Two Content">
     <p:bg>
@@ -3385,7 +2788,7 @@
 </p:sldLayout>
 </file>
 
-<file path=ppt/slideLayouts/slideLayout8.xml><?xml version="1.0" encoding="utf-8"?>
+<file path=ppt/slideLayouts/slideLayout6.xml><?xml version="1.0" encoding="utf-8"?>
 <p:sldLayout xmlns:a="http://schemas.openxmlformats.org/drawingml/2006/main" xmlns:r="http://schemas.openxmlformats.org/officeDocument/2006/relationships" xmlns:p="http://schemas.openxmlformats.org/presentationml/2006/main" type="obj" preserve="1">
   <p:cSld name="Title and Content">
     <p:spTree>
@@ -3598,6 +3001,282 @@
     <a:masterClrMapping/>
   </p:clrMapOvr>
   <p:hf sldNum="0" hdr="0" ftr="0" dt="0"/>
+</p:sldLayout>
+</file>
+
+<file path=ppt/slideLayouts/slideLayout7.xml><?xml version="1.0" encoding="utf-8"?>
+<p:sldLayout xmlns:a="http://schemas.openxmlformats.org/drawingml/2006/main" xmlns:r="http://schemas.openxmlformats.org/officeDocument/2006/relationships" xmlns:p="http://schemas.openxmlformats.org/presentationml/2006/main" userDrawn="1">
+  <p:cSld name="Title">
+    <p:spTree>
+      <p:nvGrpSpPr>
+        <p:cNvPr id="1" name=""/>
+        <p:cNvGrpSpPr/>
+        <p:nvPr/>
+      </p:nvGrpSpPr>
+      <p:grpSpPr>
+        <a:xfrm>
+          <a:off x="0" y="0"/>
+          <a:ext cx="0" cy="0"/>
+          <a:chOff x="0" y="0"/>
+          <a:chExt cx="0" cy="0"/>
+        </a:xfrm>
+      </p:grpSpPr>
+      <p:sp>
+        <p:nvSpPr>
+          <p:cNvPr id="6" name="Rectangle 5">
+            <a:extLst>
+              <a:ext uri="{FF2B5EF4-FFF2-40B4-BE49-F238E27FC236}">
+                <a16:creationId xmlns:a16="http://schemas.microsoft.com/office/drawing/2014/main" id="{751A4182-6276-41ED-8EAF-0C6A4D8FF0A8}"/>
+              </a:ext>
+              <a:ext uri="{C183D7F6-B498-43B3-948B-1728B52AA6E4}">
+                <adec:decorative xmlns:adec="http://schemas.microsoft.com/office/drawing/2017/decorative" val="1"/>
+              </a:ext>
+            </a:extLst>
+          </p:cNvPr>
+          <p:cNvSpPr/>
+          <p:nvPr userDrawn="1"/>
+        </p:nvSpPr>
+        <p:spPr>
+          <a:xfrm>
+            <a:off x="0" y="0"/>
+            <a:ext cx="12192000" cy="6099048"/>
+          </a:xfrm>
+          <a:prstGeom prst="rect">
+            <a:avLst/>
+          </a:prstGeom>
+          <a:gradFill flip="none" rotWithShape="1">
+            <a:gsLst>
+              <a:gs pos="10000">
+                <a:schemeClr val="accent5"/>
+              </a:gs>
+              <a:gs pos="90000">
+                <a:schemeClr val="accent1"/>
+              </a:gs>
+              <a:gs pos="70000">
+                <a:schemeClr val="accent2"/>
+              </a:gs>
+              <a:gs pos="30000">
+                <a:schemeClr val="accent4"/>
+              </a:gs>
+              <a:gs pos="50000">
+                <a:schemeClr val="accent3">
+                  <a:lumMod val="60000"/>
+                  <a:lumOff val="40000"/>
+                </a:schemeClr>
+              </a:gs>
+            </a:gsLst>
+            <a:lin ang="7200000" scaled="0"/>
+            <a:tileRect/>
+          </a:gradFill>
+          <a:ln>
+            <a:noFill/>
+          </a:ln>
+        </p:spPr>
+        <p:style>
+          <a:lnRef idx="2">
+            <a:schemeClr val="accent1">
+              <a:shade val="50000"/>
+            </a:schemeClr>
+          </a:lnRef>
+          <a:fillRef idx="1">
+            <a:schemeClr val="accent1"/>
+          </a:fillRef>
+          <a:effectRef idx="0">
+            <a:schemeClr val="accent1"/>
+          </a:effectRef>
+          <a:fontRef idx="minor">
+            <a:schemeClr val="lt1"/>
+          </a:fontRef>
+        </p:style>
+        <p:txBody>
+          <a:bodyPr rtlCol="0" anchor="ctr"/>
+          <a:lstStyle/>
+          <a:p>
+            <a:pPr algn="ctr"/>
+            <a:endParaRPr lang="en-US" dirty="0"/>
+          </a:p>
+        </p:txBody>
+      </p:sp>
+      <p:sp useBgFill="1">
+        <p:nvSpPr>
+          <p:cNvPr id="7" name="Rectangle 6">
+            <a:extLst>
+              <a:ext uri="{FF2B5EF4-FFF2-40B4-BE49-F238E27FC236}">
+                <a16:creationId xmlns:a16="http://schemas.microsoft.com/office/drawing/2014/main" id="{EF4B644F-A23D-409C-9540-B41AC18DB546}"/>
+              </a:ext>
+              <a:ext uri="{C183D7F6-B498-43B3-948B-1728B52AA6E4}">
+                <adec:decorative xmlns:adec="http://schemas.microsoft.com/office/drawing/2017/decorative" val="1"/>
+              </a:ext>
+            </a:extLst>
+          </p:cNvPr>
+          <p:cNvSpPr/>
+          <p:nvPr userDrawn="1"/>
+        </p:nvSpPr>
+        <p:spPr>
+          <a:xfrm>
+            <a:off x="0" y="0"/>
+            <a:ext cx="5334003" cy="6175613"/>
+          </a:xfrm>
+          <a:prstGeom prst="rect">
+            <a:avLst/>
+          </a:prstGeom>
+          <a:ln>
+            <a:noFill/>
+          </a:ln>
+        </p:spPr>
+        <p:style>
+          <a:lnRef idx="2">
+            <a:schemeClr val="accent1">
+              <a:shade val="50000"/>
+            </a:schemeClr>
+          </a:lnRef>
+          <a:fillRef idx="1">
+            <a:schemeClr val="accent1"/>
+          </a:fillRef>
+          <a:effectRef idx="0">
+            <a:schemeClr val="accent1"/>
+          </a:effectRef>
+          <a:fontRef idx="minor">
+            <a:schemeClr val="lt1"/>
+          </a:fontRef>
+        </p:style>
+        <p:txBody>
+          <a:bodyPr rtlCol="0" anchor="ctr"/>
+          <a:lstStyle/>
+          <a:p>
+            <a:pPr algn="ctr"/>
+            <a:endParaRPr lang="en-US" dirty="0"/>
+          </a:p>
+        </p:txBody>
+      </p:sp>
+      <p:sp>
+        <p:nvSpPr>
+          <p:cNvPr id="2" name="Title 1">
+            <a:extLst>
+              <a:ext uri="{FF2B5EF4-FFF2-40B4-BE49-F238E27FC236}">
+                <a16:creationId xmlns:a16="http://schemas.microsoft.com/office/drawing/2014/main" id="{470AF812-9F51-0D2C-2EA5-A8D6DA66275F}"/>
+              </a:ext>
+            </a:extLst>
+          </p:cNvPr>
+          <p:cNvSpPr>
+            <a:spLocks noGrp="1"/>
+          </p:cNvSpPr>
+          <p:nvPr>
+            <p:ph type="title"/>
+          </p:nvPr>
+        </p:nvSpPr>
+        <p:spPr>
+          <a:xfrm>
+            <a:off x="758952" y="841248"/>
+            <a:ext cx="4114800" cy="3474720"/>
+          </a:xfrm>
+        </p:spPr>
+        <p:txBody>
+          <a:bodyPr anchor="ctr">
+            <a:normAutofit/>
+          </a:bodyPr>
+          <a:lstStyle>
+            <a:lvl1pPr>
+              <a:defRPr sz="4400"/>
+            </a:lvl1pPr>
+          </a:lstStyle>
+          <a:p>
+            <a:r>
+              <a:rPr lang="en-US"/>
+              <a:t>Click to edit Master title style</a:t>
+            </a:r>
+            <a:endParaRPr lang="en-US" dirty="0"/>
+          </a:p>
+        </p:txBody>
+      </p:sp>
+      <p:sp>
+        <p:nvSpPr>
+          <p:cNvPr id="9" name="Subtitle 19">
+            <a:extLst>
+              <a:ext uri="{FF2B5EF4-FFF2-40B4-BE49-F238E27FC236}">
+                <a16:creationId xmlns:a16="http://schemas.microsoft.com/office/drawing/2014/main" id="{E8F46CAD-D4FF-4BBC-937E-CBBD034A180B}"/>
+              </a:ext>
+            </a:extLst>
+          </p:cNvPr>
+          <p:cNvSpPr>
+            <a:spLocks noGrp="1"/>
+          </p:cNvSpPr>
+          <p:nvPr>
+            <p:ph type="subTitle" idx="1" hasCustomPrompt="1"/>
+          </p:nvPr>
+        </p:nvSpPr>
+        <p:spPr>
+          <a:xfrm>
+            <a:off x="762000" y="4570807"/>
+            <a:ext cx="4123899" cy="1524000"/>
+          </a:xfrm>
+        </p:spPr>
+        <p:txBody>
+          <a:bodyPr>
+            <a:normAutofit/>
+          </a:bodyPr>
+          <a:lstStyle>
+            <a:lvl1pPr marL="0" indent="0">
+              <a:buNone/>
+              <a:defRPr sz="2400"/>
+            </a:lvl1pPr>
+          </a:lstStyle>
+          <a:p>
+            <a:pPr algn="l"/>
+            <a:r>
+              <a:rPr lang="en-US" dirty="0"/>
+              <a:t>Click to add subtitle</a:t>
+            </a:r>
+          </a:p>
+        </p:txBody>
+      </p:sp>
+      <p:sp>
+        <p:nvSpPr>
+          <p:cNvPr id="15" name="Picture Placeholder 14">
+            <a:extLst>
+              <a:ext uri="{FF2B5EF4-FFF2-40B4-BE49-F238E27FC236}">
+                <a16:creationId xmlns:a16="http://schemas.microsoft.com/office/drawing/2014/main" id="{A2750E7C-D01B-4533-A0B8-2E7EF2B168DC}"/>
+              </a:ext>
+            </a:extLst>
+          </p:cNvPr>
+          <p:cNvSpPr>
+            <a:spLocks noGrp="1"/>
+          </p:cNvSpPr>
+          <p:nvPr>
+            <p:ph type="pic" sz="quarter" idx="13"/>
+          </p:nvPr>
+        </p:nvSpPr>
+        <p:spPr>
+          <a:xfrm>
+            <a:off x="5330952" y="754711"/>
+            <a:ext cx="6099048" cy="5340096"/>
+          </a:xfrm>
+          <a:solidFill>
+            <a:schemeClr val="accent6"/>
+          </a:solidFill>
+        </p:spPr>
+        <p:txBody>
+          <a:bodyPr/>
+          <a:lstStyle/>
+          <a:p>
+            <a:r>
+              <a:rPr lang="en-US"/>
+              <a:t>Click icon to add picture</a:t>
+            </a:r>
+            <a:endParaRPr lang="en-US" dirty="0"/>
+          </a:p>
+        </p:txBody>
+      </p:sp>
+    </p:spTree>
+    <p:extLst>
+      <p:ext uri="{BB962C8B-B14F-4D97-AF65-F5344CB8AC3E}">
+        <p14:creationId xmlns:p14="http://schemas.microsoft.com/office/powerpoint/2010/main" val="38990014"/>
+      </p:ext>
+    </p:extLst>
+  </p:cSld>
+  <p:clrMapOvr>
+    <a:masterClrMapping/>
+  </p:clrMapOvr>
 </p:sldLayout>
 </file>
 
@@ -4021,14 +3700,13 @@
   </p:cSld>
   <p:clrMap bg1="lt1" tx1="dk1" bg2="lt2" tx2="dk2" accent1="accent1" accent2="accent2" accent3="accent3" accent4="accent4" accent5="accent5" accent6="accent6" hlink="hlink" folHlink="folHlink"/>
   <p:sldLayoutIdLst>
-    <p:sldLayoutId id="2147483683" r:id="rId1"/>
-    <p:sldLayoutId id="2147483696" r:id="rId2"/>
-    <p:sldLayoutId id="2147483694" r:id="rId3"/>
-    <p:sldLayoutId id="2147483697" r:id="rId4"/>
-    <p:sldLayoutId id="2147483695" r:id="rId5"/>
-    <p:sldLayoutId id="2147483688" r:id="rId6"/>
-    <p:sldLayoutId id="2147483698" r:id="rId7"/>
-    <p:sldLayoutId id="2147483673" r:id="rId8"/>
+    <p:sldLayoutId id="2147483696" r:id="rId1"/>
+    <p:sldLayoutId id="2147483694" r:id="rId2"/>
+    <p:sldLayoutId id="2147483697" r:id="rId3"/>
+    <p:sldLayoutId id="2147483695" r:id="rId4"/>
+    <p:sldLayoutId id="2147483698" r:id="rId5"/>
+    <p:sldLayoutId id="2147483673" r:id="rId6"/>
+    <p:sldLayoutId id="2147483699" r:id="rId7"/>
   </p:sldLayoutIdLst>
   <p:hf sldNum="0" hdr="0" ftr="0" dt="0"/>
   <p:txStyles>
@@ -4532,7 +4210,7 @@
           <p:cNvPr id="2" name="Title 1">
             <a:extLst>
               <a:ext uri="{FF2B5EF4-FFF2-40B4-BE49-F238E27FC236}">
-                <a16:creationId xmlns:a16="http://schemas.microsoft.com/office/drawing/2014/main" id="{B24CF172-3947-42CE-B33F-43FB799FDB5E}"/>
+                <a16:creationId xmlns:a16="http://schemas.microsoft.com/office/drawing/2014/main" id="{A3777244-CD06-AC44-3BD9-C4863490DB8C}"/>
               </a:ext>
             </a:extLst>
           </p:cNvPr>
@@ -4545,103 +4223,37 @@
         </p:nvSpPr>
         <p:spPr>
           <a:xfrm>
-            <a:off x="758952" y="1517904"/>
-            <a:ext cx="4114800" cy="4572000"/>
+            <a:off x="758951" y="841248"/>
+            <a:ext cx="10531089" cy="3474720"/>
           </a:xfrm>
         </p:spPr>
         <p:txBody>
-          <a:bodyPr/>
-          <a:lstStyle/>
-          <a:p>
-            <a:r>
-              <a:rPr lang="en-US" dirty="0"/>
-              <a:t>Session outcomes</a:t>
-            </a:r>
-          </a:p>
-        </p:txBody>
-      </p:sp>
-      <p:sp>
-        <p:nvSpPr>
-          <p:cNvPr id="3" name="Content Placeholder 2">
-            <a:extLst>
-              <a:ext uri="{FF2B5EF4-FFF2-40B4-BE49-F238E27FC236}">
-                <a16:creationId xmlns:a16="http://schemas.microsoft.com/office/drawing/2014/main" id="{F2F14772-A1EE-4EA8-8C5D-46383706A557}"/>
-              </a:ext>
-            </a:extLst>
-          </p:cNvPr>
-          <p:cNvSpPr>
-            <a:spLocks noGrp="1"/>
-          </p:cNvSpPr>
-          <p:nvPr>
-            <p:ph sz="quarter" idx="13"/>
-          </p:nvPr>
-        </p:nvSpPr>
-        <p:spPr>
-          <a:xfrm>
-            <a:off x="6096000" y="1517904"/>
-            <a:ext cx="5212080" cy="4572000"/>
-          </a:xfrm>
-        </p:spPr>
-        <p:txBody>
           <a:bodyPr>
-            <a:normAutofit fontScale="92500" lnSpcReduction="10000"/>
+            <a:normAutofit/>
           </a:bodyPr>
           <a:lstStyle/>
           <a:p>
             <a:r>
-              <a:rPr lang="en-US" b="1" dirty="0"/>
-              <a:t>By the end of this session, you will:</a:t>
-            </a:r>
-          </a:p>
-          <a:p>
-            <a:pPr marL="342900" indent="-342900">
-              <a:buFont typeface="Arial" panose="020B0604020202020204" pitchFamily="34" charset="0"/>
-              <a:buChar char="•"/>
-            </a:pPr>
-            <a:r>
-              <a:rPr lang="en-US" dirty="0"/>
-              <a:t>Use variables, conditionals, and loops in PowerShell</a:t>
-            </a:r>
-          </a:p>
-          <a:p>
-            <a:pPr marL="342900" indent="-342900">
-              <a:buFont typeface="Arial" panose="020B0604020202020204" pitchFamily="34" charset="0"/>
-              <a:buChar char="•"/>
-            </a:pPr>
-            <a:r>
-              <a:rPr lang="en-US" dirty="0"/>
-              <a:t>Load and parse CSV ticket data</a:t>
-            </a:r>
-          </a:p>
-          <a:p>
-            <a:pPr marL="342900" indent="-342900">
-              <a:buFont typeface="Arial" panose="020B0604020202020204" pitchFamily="34" charset="0"/>
-              <a:buChar char="•"/>
-            </a:pPr>
-            <a:r>
-              <a:rPr lang="en-US" dirty="0"/>
-              <a:t>Build a simple analysis script</a:t>
-            </a:r>
-          </a:p>
-          <a:p>
-            <a:pPr marL="342900" indent="-342900">
-              <a:buFont typeface="Arial" panose="020B0604020202020204" pitchFamily="34" charset="0"/>
-              <a:buChar char="•"/>
-            </a:pPr>
-            <a:r>
-              <a:rPr lang="en-US" dirty="0"/>
-              <a:t>Understand how script pre-processing can reduce AI token usage</a:t>
-            </a:r>
-          </a:p>
-          <a:p>
-            <a:endParaRPr lang="en-US" dirty="0"/>
+              <a:rPr lang="en-US" sz="3200" dirty="0"/>
+              <a:t>Follow along:</a:t>
+            </a:r>
+            <a:br>
+              <a:rPr lang="en-US" sz="3200" dirty="0"/>
+            </a:br>
+            <a:br>
+              <a:rPr lang="en-US" sz="3200" dirty="0"/>
+            </a:br>
+            <a:r>
+              <a:rPr lang="en-US" sz="3200" dirty="0"/>
+              <a:t>https://github.com/GenesisCoast/Whey-Code-Man</a:t>
+            </a:r>
           </a:p>
         </p:txBody>
       </p:sp>
     </p:spTree>
     <p:extLst>
       <p:ext uri="{BB962C8B-B14F-4D97-AF65-F5344CB8AC3E}">
-        <p14:creationId xmlns:p14="http://schemas.microsoft.com/office/powerpoint/2010/main" val="3260502912"/>
+        <p14:creationId xmlns:p14="http://schemas.microsoft.com/office/powerpoint/2010/main" val="3993558993"/>
       </p:ext>
     </p:extLst>
   </p:cSld>
@@ -4670,10 +4282,10 @@
       </p:grpSpPr>
       <p:sp>
         <p:nvSpPr>
-          <p:cNvPr id="9" name="Title 8">
-            <a:extLst>
-              <a:ext uri="{FF2B5EF4-FFF2-40B4-BE49-F238E27FC236}">
-                <a16:creationId xmlns:a16="http://schemas.microsoft.com/office/drawing/2014/main" id="{AF764D8E-8D44-4B0E-A17E-DF05833AC7B7}"/>
+          <p:cNvPr id="2" name="Title 1">
+            <a:extLst>
+              <a:ext uri="{FF2B5EF4-FFF2-40B4-BE49-F238E27FC236}">
+                <a16:creationId xmlns:a16="http://schemas.microsoft.com/office/drawing/2014/main" id="{B24CF172-3947-42CE-B33F-43FB799FDB5E}"/>
               </a:ext>
             </a:extLst>
           </p:cNvPr>
@@ -4681,34 +4293,32 @@
             <a:spLocks noGrp="1"/>
           </p:cNvSpPr>
           <p:nvPr>
-            <p:ph type="ctrTitle"/>
+            <p:ph type="title"/>
           </p:nvPr>
         </p:nvSpPr>
         <p:spPr>
           <a:xfrm>
-            <a:off x="1517904" y="1517904"/>
-            <a:ext cx="5212080" cy="2788920"/>
+            <a:off x="758952" y="1517904"/>
+            <a:ext cx="4114800" cy="4572000"/>
           </a:xfrm>
         </p:spPr>
         <p:txBody>
-          <a:bodyPr anchor="b" anchorCtr="0">
-            <a:noAutofit/>
-          </a:bodyPr>
+          <a:bodyPr/>
           <a:lstStyle/>
           <a:p>
             <a:r>
               <a:rPr lang="en-US" dirty="0"/>
-              <a:t>Service desk AI agent</a:t>
-            </a:r>
-          </a:p>
-        </p:txBody>
-      </p:sp>
-      <p:sp>
-        <p:nvSpPr>
-          <p:cNvPr id="4" name="Subtitle 3">
-            <a:extLst>
-              <a:ext uri="{FF2B5EF4-FFF2-40B4-BE49-F238E27FC236}">
-                <a16:creationId xmlns:a16="http://schemas.microsoft.com/office/drawing/2014/main" id="{EE30C49B-3963-5357-7913-37FEE1C74688}"/>
+              <a:t>Session outcomes</a:t>
+            </a:r>
+          </a:p>
+        </p:txBody>
+      </p:sp>
+      <p:sp>
+        <p:nvSpPr>
+          <p:cNvPr id="3" name="Content Placeholder 2">
+            <a:extLst>
+              <a:ext uri="{FF2B5EF4-FFF2-40B4-BE49-F238E27FC236}">
+                <a16:creationId xmlns:a16="http://schemas.microsoft.com/office/drawing/2014/main" id="{F2F14772-A1EE-4EA8-8C5D-46383706A557}"/>
               </a:ext>
             </a:extLst>
           </p:cNvPr>
@@ -4716,60 +4326,75 @@
             <a:spLocks noGrp="1"/>
           </p:cNvSpPr>
           <p:nvPr>
-            <p:ph type="subTitle" idx="1"/>
+            <p:ph sz="quarter" idx="13"/>
           </p:nvPr>
         </p:nvSpPr>
         <p:spPr>
           <a:xfrm>
-            <a:off x="1517904" y="4571999"/>
-            <a:ext cx="5212080" cy="1645920"/>
+            <a:off x="6096000" y="1517904"/>
+            <a:ext cx="5212080" cy="4572000"/>
           </a:xfrm>
         </p:spPr>
         <p:txBody>
           <a:bodyPr>
-            <a:normAutofit/>
+            <a:normAutofit fontScale="92500" lnSpcReduction="10000"/>
           </a:bodyPr>
           <a:lstStyle/>
           <a:p>
             <a:r>
+              <a:rPr lang="en-US" b="1" dirty="0"/>
+              <a:t>By the end of this session, you will:</a:t>
+            </a:r>
+          </a:p>
+          <a:p>
+            <a:pPr marL="342900" indent="-342900">
+              <a:buFont typeface="Arial" panose="020B0604020202020204" pitchFamily="34" charset="0"/>
+              <a:buChar char="•"/>
+            </a:pPr>
+            <a:r>
               <a:rPr lang="en-US" dirty="0"/>
-              <a:t>Thanks Dean!</a:t>
-            </a:r>
-          </a:p>
-        </p:txBody>
-      </p:sp>
-      <p:pic>
-        <p:nvPicPr>
-          <p:cNvPr id="8" name="Picture Placeholder 7" descr="Close up of lemon slice">
-            <a:extLst>
-              <a:ext uri="{FF2B5EF4-FFF2-40B4-BE49-F238E27FC236}">
-                <a16:creationId xmlns:a16="http://schemas.microsoft.com/office/drawing/2014/main" id="{794FCA34-8775-307F-A2B4-9661CAE5877F}"/>
-              </a:ext>
-            </a:extLst>
-          </p:cNvPr>
-          <p:cNvPicPr>
-            <a:picLocks noGrp="1" noChangeAspect="1"/>
-          </p:cNvPicPr>
-          <p:nvPr>
-            <p:ph type="pic" sz="quarter" idx="13"/>
-          </p:nvPr>
-        </p:nvPicPr>
-        <p:blipFill rotWithShape="1">
-          <a:blip r:embed="rId3"/>
-          <a:srcRect t="7" b="7"/>
-          <a:stretch/>
-        </p:blipFill>
-        <p:spPr>
-          <a:xfrm>
-            <a:off x="7013448" y="756284"/>
-            <a:ext cx="4434840" cy="5349240"/>
-          </a:xfrm>
-        </p:spPr>
-      </p:pic>
+              <a:t>Use variables, conditionals, and loops in PowerShell</a:t>
+            </a:r>
+          </a:p>
+          <a:p>
+            <a:pPr marL="342900" indent="-342900">
+              <a:buFont typeface="Arial" panose="020B0604020202020204" pitchFamily="34" charset="0"/>
+              <a:buChar char="•"/>
+            </a:pPr>
+            <a:r>
+              <a:rPr lang="en-US" dirty="0"/>
+              <a:t>Load and parse CSV ticket data</a:t>
+            </a:r>
+          </a:p>
+          <a:p>
+            <a:pPr marL="342900" indent="-342900">
+              <a:buFont typeface="Arial" panose="020B0604020202020204" pitchFamily="34" charset="0"/>
+              <a:buChar char="•"/>
+            </a:pPr>
+            <a:r>
+              <a:rPr lang="en-US" dirty="0"/>
+              <a:t>Build a simple analysis script</a:t>
+            </a:r>
+          </a:p>
+          <a:p>
+            <a:pPr marL="342900" indent="-342900">
+              <a:buFont typeface="Arial" panose="020B0604020202020204" pitchFamily="34" charset="0"/>
+              <a:buChar char="•"/>
+            </a:pPr>
+            <a:r>
+              <a:rPr lang="en-US" dirty="0"/>
+              <a:t>Understand how script pre-processing can reduce AI token usage</a:t>
+            </a:r>
+          </a:p>
+          <a:p>
+            <a:endParaRPr lang="en-US" dirty="0"/>
+          </a:p>
+        </p:txBody>
+      </p:sp>
     </p:spTree>
     <p:extLst>
       <p:ext uri="{BB962C8B-B14F-4D97-AF65-F5344CB8AC3E}">
-        <p14:creationId xmlns:p14="http://schemas.microsoft.com/office/powerpoint/2010/main" val="714287392"/>
+        <p14:creationId xmlns:p14="http://schemas.microsoft.com/office/powerpoint/2010/main" val="3260502912"/>
       </p:ext>
     </p:extLst>
   </p:cSld>
@@ -4796,251 +4421,766 @@
           <a:chExt cx="0" cy="0"/>
         </a:xfrm>
       </p:grpSpPr>
-      <p:sp>
-        <p:nvSpPr>
-          <p:cNvPr id="11" name="Text Placeholder 2">
-            <a:extLst>
-              <a:ext uri="{FF2B5EF4-FFF2-40B4-BE49-F238E27FC236}">
-                <a16:creationId xmlns:a16="http://schemas.microsoft.com/office/drawing/2014/main" id="{5734F416-9FCC-51D8-C785-C190FC9D9D6C}"/>
-              </a:ext>
-            </a:extLst>
-          </p:cNvPr>
-          <p:cNvSpPr txBox="1">
-            <a:spLocks/>
-          </p:cNvSpPr>
+      <p:pic>
+        <p:nvPicPr>
+          <p:cNvPr id="13" name="Picture 2" descr="Set of 10 Programming Language Logo Vector Icons: CSS, HTML, Javascript ...">
+            <a:extLst>
+              <a:ext uri="{FF2B5EF4-FFF2-40B4-BE49-F238E27FC236}">
+                <a16:creationId xmlns:a16="http://schemas.microsoft.com/office/drawing/2014/main" id="{9B63FE1D-4469-5382-B255-ADE31B4A19FA}"/>
+              </a:ext>
+            </a:extLst>
+          </p:cNvPr>
+          <p:cNvPicPr>
+            <a:picLocks noChangeAspect="1" noChangeArrowheads="1"/>
+          </p:cNvPicPr>
           <p:nvPr/>
-        </p:nvSpPr>
-        <p:spPr>
+        </p:nvPicPr>
+        <p:blipFill>
+          <a:blip r:embed="rId2">
+            <a:extLst>
+              <a:ext uri="{28A0092B-C50C-407E-A947-70E740481C1C}">
+                <a14:useLocalDpi xmlns:a14="http://schemas.microsoft.com/office/drawing/2010/main" val="0"/>
+              </a:ext>
+            </a:extLst>
+          </a:blip>
+          <a:srcRect/>
+          <a:stretch>
+            <a:fillRect/>
+          </a:stretch>
+        </p:blipFill>
+        <p:spPr bwMode="auto">
           <a:xfrm>
-            <a:off x="838200" y="1825625"/>
-            <a:ext cx="10515600" cy="4351338"/>
+            <a:off x="1045172" y="1172424"/>
+            <a:ext cx="4514850" cy="1933575"/>
           </a:xfrm>
           <a:prstGeom prst="rect">
             <a:avLst/>
           </a:prstGeom>
+          <a:noFill/>
+          <a:extLst>
+            <a:ext uri="{909E8E84-426E-40DD-AFC4-6F175D3DCCD1}">
+              <a14:hiddenFill xmlns:a14="http://schemas.microsoft.com/office/drawing/2010/main">
+                <a:solidFill>
+                  <a:srgbClr val="FFFFFF"/>
+                </a:solidFill>
+              </a14:hiddenFill>
+            </a:ext>
+          </a:extLst>
         </p:spPr>
-        <p:txBody>
-          <a:bodyPr>
-            <a:normAutofit fontScale="92500" lnSpcReduction="20000"/>
-          </a:bodyPr>
-          <a:lstStyle>
-            <a:lvl1pPr marL="365760" indent="-365760" algn="l" defTabSz="914400" rtl="0" eaLnBrk="1" latinLnBrk="0" hangingPunct="1">
-              <a:lnSpc>
-                <a:spcPct val="105000"/>
-              </a:lnSpc>
-              <a:spcBef>
-                <a:spcPts val="900"/>
-              </a:spcBef>
-              <a:buClr>
-                <a:schemeClr val="accent5"/>
-              </a:buClr>
-              <a:buFont typeface="Avenir Next LT Pro" panose="020B0504020202020204" pitchFamily="34" charset="0"/>
-              <a:buChar char="+"/>
-              <a:defRPr sz="2600" kern="1200">
-                <a:solidFill>
-                  <a:schemeClr val="tx1"/>
-                </a:solidFill>
-                <a:latin typeface="+mn-lt"/>
-                <a:ea typeface="+mn-ea"/>
-                <a:cs typeface="+mn-cs"/>
-              </a:defRPr>
-            </a:lvl1pPr>
-            <a:lvl2pPr marL="365760" indent="0" algn="l" defTabSz="914400" rtl="0" eaLnBrk="1" latinLnBrk="0" hangingPunct="1">
-              <a:lnSpc>
-                <a:spcPct val="105000"/>
-              </a:lnSpc>
-              <a:spcBef>
-                <a:spcPts val="900"/>
-              </a:spcBef>
-              <a:buFont typeface="Arial" panose="020B0604020202020204" pitchFamily="34" charset="0"/>
-              <a:buNone/>
-              <a:defRPr sz="2000" kern="1200">
-                <a:solidFill>
-                  <a:schemeClr val="tx1">
-                    <a:lumMod val="75000"/>
-                    <a:lumOff val="25000"/>
-                  </a:schemeClr>
-                </a:solidFill>
-                <a:latin typeface="+mn-lt"/>
-                <a:ea typeface="+mn-ea"/>
-                <a:cs typeface="+mn-cs"/>
-              </a:defRPr>
-            </a:lvl2pPr>
-            <a:lvl3pPr marL="640080" indent="-274320" algn="l" defTabSz="914400" rtl="0" eaLnBrk="1" latinLnBrk="0" hangingPunct="1">
-              <a:lnSpc>
-                <a:spcPct val="105000"/>
-              </a:lnSpc>
-              <a:spcBef>
-                <a:spcPts val="600"/>
-              </a:spcBef>
-              <a:buClr>
-                <a:schemeClr val="accent5"/>
-              </a:buClr>
-              <a:buFont typeface="Avenir Next LT Pro" panose="020B0504020202020204" pitchFamily="34" charset="0"/>
-              <a:buChar char="+"/>
-              <a:defRPr sz="2000" kern="1200">
-                <a:solidFill>
-                  <a:schemeClr val="tx1"/>
-                </a:solidFill>
-                <a:latin typeface="+mn-lt"/>
-                <a:ea typeface="+mn-ea"/>
-                <a:cs typeface="+mn-cs"/>
-              </a:defRPr>
-            </a:lvl3pPr>
-            <a:lvl4pPr marL="640080" indent="0" algn="l" defTabSz="914400" rtl="0" eaLnBrk="1" latinLnBrk="0" hangingPunct="1">
-              <a:lnSpc>
-                <a:spcPct val="105000"/>
-              </a:lnSpc>
-              <a:spcBef>
-                <a:spcPts val="600"/>
-              </a:spcBef>
-              <a:buFontTx/>
-              <a:buNone/>
-              <a:defRPr sz="1800" i="1" kern="1200">
-                <a:solidFill>
-                  <a:schemeClr val="tx1">
-                    <a:lumMod val="75000"/>
-                    <a:lumOff val="25000"/>
-                  </a:schemeClr>
-                </a:solidFill>
-                <a:latin typeface="+mn-lt"/>
-                <a:ea typeface="+mn-ea"/>
-                <a:cs typeface="+mn-cs"/>
-              </a:defRPr>
-            </a:lvl4pPr>
-            <a:lvl5pPr marL="886968" indent="-274320" algn="l" defTabSz="914400" rtl="0" eaLnBrk="1" latinLnBrk="0" hangingPunct="1">
-              <a:lnSpc>
-                <a:spcPct val="105000"/>
-              </a:lnSpc>
-              <a:spcBef>
-                <a:spcPts val="600"/>
-              </a:spcBef>
-              <a:buClr>
-                <a:schemeClr val="accent5"/>
-              </a:buClr>
-              <a:buFont typeface="Avenir Next LT Pro" panose="020B0504020202020204" pitchFamily="34" charset="0"/>
-              <a:buChar char="+"/>
-              <a:defRPr sz="1800" kern="1200">
-                <a:solidFill>
-                  <a:schemeClr val="tx1"/>
-                </a:solidFill>
-                <a:latin typeface="+mn-lt"/>
-                <a:ea typeface="+mn-ea"/>
-                <a:cs typeface="+mn-cs"/>
-              </a:defRPr>
-            </a:lvl5pPr>
-            <a:lvl6pPr marL="2514600" indent="-228600" algn="l" defTabSz="914400" rtl="0" eaLnBrk="1" latinLnBrk="0" hangingPunct="1">
-              <a:lnSpc>
-                <a:spcPct val="90000"/>
-              </a:lnSpc>
-              <a:spcBef>
-                <a:spcPts val="500"/>
-              </a:spcBef>
-              <a:buFont typeface="Arial" panose="020B0604020202020204" pitchFamily="34" charset="0"/>
-              <a:buChar char="•"/>
-              <a:defRPr sz="1800" kern="1200">
-                <a:solidFill>
-                  <a:schemeClr val="tx1"/>
-                </a:solidFill>
-                <a:latin typeface="+mn-lt"/>
-                <a:ea typeface="+mn-ea"/>
-                <a:cs typeface="+mn-cs"/>
-              </a:defRPr>
-            </a:lvl6pPr>
-            <a:lvl7pPr marL="2971800" indent="-228600" algn="l" defTabSz="914400" rtl="0" eaLnBrk="1" latinLnBrk="0" hangingPunct="1">
-              <a:lnSpc>
-                <a:spcPct val="90000"/>
-              </a:lnSpc>
-              <a:spcBef>
-                <a:spcPts val="500"/>
-              </a:spcBef>
-              <a:buFont typeface="Arial" panose="020B0604020202020204" pitchFamily="34" charset="0"/>
-              <a:buChar char="•"/>
-              <a:defRPr sz="1800" kern="1200">
-                <a:solidFill>
-                  <a:schemeClr val="tx1"/>
-                </a:solidFill>
-                <a:latin typeface="+mn-lt"/>
-                <a:ea typeface="+mn-ea"/>
-                <a:cs typeface="+mn-cs"/>
-              </a:defRPr>
-            </a:lvl7pPr>
-            <a:lvl8pPr marL="3429000" indent="-228600" algn="l" defTabSz="914400" rtl="0" eaLnBrk="1" latinLnBrk="0" hangingPunct="1">
-              <a:lnSpc>
-                <a:spcPct val="90000"/>
-              </a:lnSpc>
-              <a:spcBef>
-                <a:spcPts val="500"/>
-              </a:spcBef>
-              <a:buFont typeface="Arial" panose="020B0604020202020204" pitchFamily="34" charset="0"/>
-              <a:buChar char="•"/>
-              <a:defRPr sz="1800" kern="1200">
-                <a:solidFill>
-                  <a:schemeClr val="tx1"/>
-                </a:solidFill>
-                <a:latin typeface="+mn-lt"/>
-                <a:ea typeface="+mn-ea"/>
-                <a:cs typeface="+mn-cs"/>
-              </a:defRPr>
-            </a:lvl8pPr>
-            <a:lvl9pPr marL="3886200" indent="-228600" algn="l" defTabSz="914400" rtl="0" eaLnBrk="1" latinLnBrk="0" hangingPunct="1">
-              <a:lnSpc>
-                <a:spcPct val="90000"/>
-              </a:lnSpc>
-              <a:spcBef>
-                <a:spcPts val="500"/>
-              </a:spcBef>
-              <a:buFont typeface="Arial" panose="020B0604020202020204" pitchFamily="34" charset="0"/>
-              <a:buChar char="•"/>
-              <a:defRPr sz="1800" kern="1200">
-                <a:solidFill>
-                  <a:schemeClr val="tx1"/>
-                </a:solidFill>
-                <a:latin typeface="+mn-lt"/>
-                <a:ea typeface="+mn-ea"/>
-                <a:cs typeface="+mn-cs"/>
-              </a:defRPr>
-            </a:lvl9pPr>
-          </a:lstStyle>
-          <a:p>
-            <a:r>
-              <a:rPr lang="en-US"/>
-              <a:t>Language | Common Use | Pros | Cons</a:t>
-            </a:r>
-          </a:p>
-          <a:p>
-            <a:r>
-              <a:rPr lang="en-US"/>
-              <a:t>PowerShell | Automation, admin, Windows scripting | Great for ops/data tasks, object pipeline | Less common in web apps</a:t>
-            </a:r>
-          </a:p>
-          <a:p>
-            <a:r>
-              <a:rPr lang="en-US"/>
-              <a:t>Python | Data, scripting, automation | Simple syntax, huge ecosystem | Packaging/env setup can confuse beginners</a:t>
-            </a:r>
-          </a:p>
-          <a:p>
-            <a:r>
-              <a:rPr lang="en-US"/>
-              <a:t>JavaScript | Web front/back end | Ubiquitous, flexible | Async complexity, tooling overhead</a:t>
-            </a:r>
-          </a:p>
-          <a:p>
-            <a:r>
-              <a:rPr lang="en-US"/>
-              <a:t>C# | Enterprise apps, APIs | Strong tooling, structure, performance | More ceremony for small scripts</a:t>
-            </a:r>
-          </a:p>
-          <a:p>
-            <a:r>
-              <a:rPr lang="en-US"/>
-              <a:t>Bash | Linux/macOS shell automation | Lightweight, fast for shell tasks | Less friendly on Windows, text-only pipelines</a:t>
-            </a:r>
-            <a:endParaRPr lang="en-US" dirty="0"/>
-          </a:p>
-        </p:txBody>
-      </p:sp>
+      </p:pic>
+      <p:sp>
+        <p:nvSpPr>
+          <p:cNvPr id="14" name="Title 1">
+            <a:extLst>
+              <a:ext uri="{FF2B5EF4-FFF2-40B4-BE49-F238E27FC236}">
+                <a16:creationId xmlns:a16="http://schemas.microsoft.com/office/drawing/2014/main" id="{80DE0B49-79AF-275E-A107-6443EA3DAE98}"/>
+              </a:ext>
+            </a:extLst>
+          </p:cNvPr>
+          <p:cNvSpPr>
+            <a:spLocks noGrp="1"/>
+          </p:cNvSpPr>
+          <p:nvPr>
+            <p:ph type="title"/>
+          </p:nvPr>
+        </p:nvSpPr>
+        <p:spPr>
+          <a:xfrm>
+            <a:off x="7413249" y="159884"/>
+            <a:ext cx="4114800" cy="4572000"/>
+          </a:xfrm>
+        </p:spPr>
+        <p:txBody>
+          <a:bodyPr/>
+          <a:lstStyle/>
+          <a:p>
+            <a:r>
+              <a:rPr lang="en-US" dirty="0"/>
+              <a:t>Languages</a:t>
+            </a:r>
+          </a:p>
+        </p:txBody>
+      </p:sp>
+      <p:graphicFrame>
+        <p:nvGraphicFramePr>
+          <p:cNvPr id="15" name="Table 14">
+            <a:extLst>
+              <a:ext uri="{FF2B5EF4-FFF2-40B4-BE49-F238E27FC236}">
+                <a16:creationId xmlns:a16="http://schemas.microsoft.com/office/drawing/2014/main" id="{DFA82F0D-BD42-EA39-AA73-F8F29099C5F4}"/>
+              </a:ext>
+            </a:extLst>
+          </p:cNvPr>
+          <p:cNvGraphicFramePr>
+            <a:graphicFrameLocks noGrp="1"/>
+          </p:cNvGraphicFramePr>
+          <p:nvPr/>
+        </p:nvGraphicFramePr>
+        <p:xfrm>
+          <a:off x="1248437" y="3279146"/>
+          <a:ext cx="10279612" cy="3132125"/>
+        </p:xfrm>
+        <a:graphic>
+          <a:graphicData uri="http://schemas.openxmlformats.org/drawingml/2006/table">
+            <a:tbl>
+              <a:tblPr>
+                <a:tableStyleId>{22838BEF-8BB2-4498-84A7-C5851F593DF1}</a:tableStyleId>
+              </a:tblPr>
+              <a:tblGrid>
+                <a:gridCol w="2569903">
+                  <a:extLst>
+                    <a:ext uri="{9D8B030D-6E8A-4147-A177-3AD203B41FA5}">
+                      <a16:colId xmlns:a16="http://schemas.microsoft.com/office/drawing/2014/main" val="1170943750"/>
+                    </a:ext>
+                  </a:extLst>
+                </a:gridCol>
+                <a:gridCol w="2569903">
+                  <a:extLst>
+                    <a:ext uri="{9D8B030D-6E8A-4147-A177-3AD203B41FA5}">
+                      <a16:colId xmlns:a16="http://schemas.microsoft.com/office/drawing/2014/main" val="2585794386"/>
+                    </a:ext>
+                  </a:extLst>
+                </a:gridCol>
+                <a:gridCol w="2569903">
+                  <a:extLst>
+                    <a:ext uri="{9D8B030D-6E8A-4147-A177-3AD203B41FA5}">
+                      <a16:colId xmlns:a16="http://schemas.microsoft.com/office/drawing/2014/main" val="3082700237"/>
+                    </a:ext>
+                  </a:extLst>
+                </a:gridCol>
+                <a:gridCol w="2569903">
+                  <a:extLst>
+                    <a:ext uri="{9D8B030D-6E8A-4147-A177-3AD203B41FA5}">
+                      <a16:colId xmlns:a16="http://schemas.microsoft.com/office/drawing/2014/main" val="4007824920"/>
+                    </a:ext>
+                  </a:extLst>
+                </a:gridCol>
+              </a:tblGrid>
+              <a:tr h="135973">
+                <a:tc>
+                  <a:txBody>
+                    <a:bodyPr/>
+                    <a:lstStyle/>
+                    <a:p>
+                      <a:pPr>
+                        <a:buNone/>
+                      </a:pPr>
+                      <a:r>
+                        <a:rPr lang="en-US" sz="1200">
+                          <a:effectLst/>
+                        </a:rPr>
+                        <a:t>Language</a:t>
+                      </a:r>
+                    </a:p>
+                  </a:txBody>
+                  <a:tcPr marL="33993" marR="33993" marT="16997" marB="16997" anchor="ctr"/>
+                </a:tc>
+                <a:tc>
+                  <a:txBody>
+                    <a:bodyPr/>
+                    <a:lstStyle/>
+                    <a:p>
+                      <a:pPr>
+                        <a:buNone/>
+                      </a:pPr>
+                      <a:r>
+                        <a:rPr lang="en-US" sz="1200">
+                          <a:effectLst/>
+                        </a:rPr>
+                        <a:t>Type (how it runs)</a:t>
+                      </a:r>
+                    </a:p>
+                  </a:txBody>
+                  <a:tcPr marL="33993" marR="33993" marT="16997" marB="16997" anchor="ctr"/>
+                </a:tc>
+                <a:tc>
+                  <a:txBody>
+                    <a:bodyPr/>
+                    <a:lstStyle/>
+                    <a:p>
+                      <a:pPr>
+                        <a:buNone/>
+                      </a:pPr>
+                      <a:r>
+                        <a:rPr lang="en-US" sz="1200" dirty="0">
+                          <a:effectLst/>
+                        </a:rPr>
+                        <a:t>Pros</a:t>
+                      </a:r>
+                    </a:p>
+                  </a:txBody>
+                  <a:tcPr marL="33993" marR="33993" marT="16997" marB="16997" anchor="ctr"/>
+                </a:tc>
+                <a:tc>
+                  <a:txBody>
+                    <a:bodyPr/>
+                    <a:lstStyle/>
+                    <a:p>
+                      <a:pPr>
+                        <a:buNone/>
+                      </a:pPr>
+                      <a:r>
+                        <a:rPr lang="en-US" sz="1200" dirty="0">
+                          <a:effectLst/>
+                        </a:rPr>
+                        <a:t>Cons</a:t>
+                      </a:r>
+                    </a:p>
+                  </a:txBody>
+                  <a:tcPr marL="33993" marR="33993" marT="16997" marB="16997" anchor="ctr"/>
+                </a:tc>
+                <a:extLst>
+                  <a:ext uri="{0D108BD9-81ED-4DB2-BD59-A6C34878D82A}">
+                    <a16:rowId xmlns:a16="http://schemas.microsoft.com/office/drawing/2014/main" val="4229444329"/>
+                  </a:ext>
+                </a:extLst>
+              </a:tr>
+              <a:tr h="237952">
+                <a:tc>
+                  <a:txBody>
+                    <a:bodyPr/>
+                    <a:lstStyle/>
+                    <a:p>
+                      <a:pPr>
+                        <a:buNone/>
+                      </a:pPr>
+                      <a:r>
+                        <a:rPr lang="en-US" sz="1200" b="1">
+                          <a:effectLst/>
+                        </a:rPr>
+                        <a:t>C#</a:t>
+                      </a:r>
+                      <a:endParaRPr lang="en-US" sz="1200">
+                        <a:effectLst/>
+                      </a:endParaRPr>
+                    </a:p>
+                  </a:txBody>
+                  <a:tcPr marL="33993" marR="33993" marT="16997" marB="16997" anchor="ctr"/>
+                </a:tc>
+                <a:tc>
+                  <a:txBody>
+                    <a:bodyPr/>
+                    <a:lstStyle/>
+                    <a:p>
+                      <a:pPr>
+                        <a:buNone/>
+                      </a:pPr>
+                      <a:r>
+                        <a:rPr lang="en-US" sz="1200">
+                          <a:effectLst/>
+                        </a:rPr>
+                        <a:t>Compiled → </a:t>
+                      </a:r>
+                      <a:r>
+                        <a:rPr lang="en-US" sz="1200" b="1">
+                          <a:effectLst/>
+                        </a:rPr>
+                        <a:t>JIT / AOT</a:t>
+                      </a:r>
+                      <a:endParaRPr lang="en-US" sz="1200">
+                        <a:effectLst/>
+                      </a:endParaRPr>
+                    </a:p>
+                  </a:txBody>
+                  <a:tcPr marL="33993" marR="33993" marT="16997" marB="16997" anchor="ctr"/>
+                </a:tc>
+                <a:tc>
+                  <a:txBody>
+                    <a:bodyPr/>
+                    <a:lstStyle/>
+                    <a:p>
+                      <a:pPr>
+                        <a:buNone/>
+                      </a:pPr>
+                      <a:r>
+                        <a:rPr lang="en-US" sz="1200">
+                          <a:effectLst/>
+                        </a:rPr>
+                        <a:t>Fast, great tooling, strong for APIs</a:t>
+                      </a:r>
+                    </a:p>
+                  </a:txBody>
+                  <a:tcPr marL="33993" marR="33993" marT="16997" marB="16997" anchor="ctr"/>
+                </a:tc>
+                <a:tc>
+                  <a:txBody>
+                    <a:bodyPr/>
+                    <a:lstStyle/>
+                    <a:p>
+                      <a:pPr>
+                        <a:buNone/>
+                      </a:pPr>
+                      <a:r>
+                        <a:rPr lang="en-US" sz="1200" dirty="0">
+                          <a:effectLst/>
+                        </a:rPr>
+                        <a:t>More boilerplate</a:t>
+                      </a:r>
+                    </a:p>
+                  </a:txBody>
+                  <a:tcPr marL="33993" marR="33993" marT="16997" marB="16997" anchor="ctr"/>
+                </a:tc>
+                <a:extLst>
+                  <a:ext uri="{0D108BD9-81ED-4DB2-BD59-A6C34878D82A}">
+                    <a16:rowId xmlns:a16="http://schemas.microsoft.com/office/drawing/2014/main" val="958994472"/>
+                  </a:ext>
+                </a:extLst>
+              </a:tr>
+              <a:tr h="339932">
+                <a:tc>
+                  <a:txBody>
+                    <a:bodyPr/>
+                    <a:lstStyle/>
+                    <a:p>
+                      <a:pPr>
+                        <a:buNone/>
+                      </a:pPr>
+                      <a:r>
+                        <a:rPr lang="en-US" sz="1200" b="1">
+                          <a:effectLst/>
+                        </a:rPr>
+                        <a:t>Java</a:t>
+                      </a:r>
+                      <a:endParaRPr lang="en-US" sz="1200">
+                        <a:effectLst/>
+                      </a:endParaRPr>
+                    </a:p>
+                  </a:txBody>
+                  <a:tcPr marL="33993" marR="33993" marT="16997" marB="16997" anchor="ctr"/>
+                </a:tc>
+                <a:tc>
+                  <a:txBody>
+                    <a:bodyPr/>
+                    <a:lstStyle/>
+                    <a:p>
+                      <a:pPr>
+                        <a:buNone/>
+                      </a:pPr>
+                      <a:r>
+                        <a:rPr lang="en-US" sz="1200">
+                          <a:effectLst/>
+                        </a:rPr>
+                        <a:t>Compiled → </a:t>
+                      </a:r>
+                      <a:r>
+                        <a:rPr lang="en-US" sz="1200" b="1">
+                          <a:effectLst/>
+                        </a:rPr>
+                        <a:t>JIT</a:t>
+                      </a:r>
+                      <a:endParaRPr lang="en-US" sz="1200">
+                        <a:effectLst/>
+                      </a:endParaRPr>
+                    </a:p>
+                  </a:txBody>
+                  <a:tcPr marL="33993" marR="33993" marT="16997" marB="16997" anchor="ctr"/>
+                </a:tc>
+                <a:tc>
+                  <a:txBody>
+                    <a:bodyPr/>
+                    <a:lstStyle/>
+                    <a:p>
+                      <a:pPr>
+                        <a:buNone/>
+                      </a:pPr>
+                      <a:r>
+                        <a:rPr lang="en-US" sz="1200">
+                          <a:effectLst/>
+                        </a:rPr>
+                        <a:t>Portable, huge ecosystem</a:t>
+                      </a:r>
+                    </a:p>
+                  </a:txBody>
+                  <a:tcPr marL="33993" marR="33993" marT="16997" marB="16997" anchor="ctr"/>
+                </a:tc>
+                <a:tc>
+                  <a:txBody>
+                    <a:bodyPr/>
+                    <a:lstStyle/>
+                    <a:p>
+                      <a:pPr>
+                        <a:buNone/>
+                      </a:pPr>
+                      <a:r>
+                        <a:rPr lang="en-US" sz="1200" dirty="0">
+                          <a:effectLst/>
+                        </a:rPr>
+                        <a:t>Verbose, JVM tuning</a:t>
+                      </a:r>
+                    </a:p>
+                  </a:txBody>
+                  <a:tcPr marL="33993" marR="33993" marT="16997" marB="16997" anchor="ctr"/>
+                </a:tc>
+                <a:extLst>
+                  <a:ext uri="{0D108BD9-81ED-4DB2-BD59-A6C34878D82A}">
+                    <a16:rowId xmlns:a16="http://schemas.microsoft.com/office/drawing/2014/main" val="4118677239"/>
+                  </a:ext>
+                </a:extLst>
+              </a:tr>
+              <a:tr h="441912">
+                <a:tc>
+                  <a:txBody>
+                    <a:bodyPr/>
+                    <a:lstStyle/>
+                    <a:p>
+                      <a:pPr>
+                        <a:buNone/>
+                      </a:pPr>
+                      <a:r>
+                        <a:rPr lang="en-US" sz="1200" b="1">
+                          <a:effectLst/>
+                        </a:rPr>
+                        <a:t>Python</a:t>
+                      </a:r>
+                      <a:endParaRPr lang="en-US" sz="1200">
+                        <a:effectLst/>
+                      </a:endParaRPr>
+                    </a:p>
+                  </a:txBody>
+                  <a:tcPr marL="33993" marR="33993" marT="16997" marB="16997" anchor="ctr"/>
+                </a:tc>
+                <a:tc>
+                  <a:txBody>
+                    <a:bodyPr/>
+                    <a:lstStyle/>
+                    <a:p>
+                      <a:pPr>
+                        <a:buNone/>
+                      </a:pPr>
+                      <a:r>
+                        <a:rPr lang="en-US" sz="1200" b="1">
+                          <a:effectLst/>
+                        </a:rPr>
+                        <a:t>Interpreted</a:t>
+                      </a:r>
+                      <a:r>
+                        <a:rPr lang="en-US" sz="1200">
+                          <a:effectLst/>
+                        </a:rPr>
+                        <a:t> (bytecode VM)</a:t>
+                      </a:r>
+                    </a:p>
+                  </a:txBody>
+                  <a:tcPr marL="33993" marR="33993" marT="16997" marB="16997" anchor="ctr"/>
+                </a:tc>
+                <a:tc>
+                  <a:txBody>
+                    <a:bodyPr/>
+                    <a:lstStyle/>
+                    <a:p>
+                      <a:pPr>
+                        <a:buNone/>
+                      </a:pPr>
+                      <a:r>
+                        <a:rPr lang="en-US" sz="1200">
+                          <a:effectLst/>
+                        </a:rPr>
+                        <a:t>Very easy, rapid dev, big libs</a:t>
+                      </a:r>
+                    </a:p>
+                  </a:txBody>
+                  <a:tcPr marL="33993" marR="33993" marT="16997" marB="16997" anchor="ctr"/>
+                </a:tc>
+                <a:tc>
+                  <a:txBody>
+                    <a:bodyPr/>
+                    <a:lstStyle/>
+                    <a:p>
+                      <a:pPr>
+                        <a:buNone/>
+                      </a:pPr>
+                      <a:r>
+                        <a:rPr lang="en-US" sz="1200" dirty="0">
+                          <a:effectLst/>
+                        </a:rPr>
+                        <a:t>Slower for CPU-heavy work</a:t>
+                      </a:r>
+                    </a:p>
+                  </a:txBody>
+                  <a:tcPr marL="33993" marR="33993" marT="16997" marB="16997" anchor="ctr"/>
+                </a:tc>
+                <a:extLst>
+                  <a:ext uri="{0D108BD9-81ED-4DB2-BD59-A6C34878D82A}">
+                    <a16:rowId xmlns:a16="http://schemas.microsoft.com/office/drawing/2014/main" val="1371435029"/>
+                  </a:ext>
+                </a:extLst>
+              </a:tr>
+              <a:tr h="543891">
+                <a:tc>
+                  <a:txBody>
+                    <a:bodyPr/>
+                    <a:lstStyle/>
+                    <a:p>
+                      <a:pPr>
+                        <a:buNone/>
+                      </a:pPr>
+                      <a:r>
+                        <a:rPr lang="en-US" sz="1200" b="1">
+                          <a:effectLst/>
+                        </a:rPr>
+                        <a:t>PHP</a:t>
+                      </a:r>
+                      <a:endParaRPr lang="en-US" sz="1200">
+                        <a:effectLst/>
+                      </a:endParaRPr>
+                    </a:p>
+                  </a:txBody>
+                  <a:tcPr marL="33993" marR="33993" marT="16997" marB="16997" anchor="ctr"/>
+                </a:tc>
+                <a:tc>
+                  <a:txBody>
+                    <a:bodyPr/>
+                    <a:lstStyle/>
+                    <a:p>
+                      <a:pPr>
+                        <a:buNone/>
+                      </a:pPr>
+                      <a:r>
+                        <a:rPr lang="en-US" sz="1200" b="1">
+                          <a:effectLst/>
+                        </a:rPr>
+                        <a:t>Interpreted</a:t>
+                      </a:r>
+                      <a:r>
+                        <a:rPr lang="en-US" sz="1200">
+                          <a:effectLst/>
+                        </a:rPr>
+                        <a:t> (with optional </a:t>
+                      </a:r>
+                      <a:r>
+                        <a:rPr lang="en-US" sz="1200" b="1">
+                          <a:effectLst/>
+                        </a:rPr>
+                        <a:t>JIT</a:t>
+                      </a:r>
+                      <a:r>
+                        <a:rPr lang="en-US" sz="1200">
+                          <a:effectLst/>
+                        </a:rPr>
+                        <a:t>)</a:t>
+                      </a:r>
+                    </a:p>
+                  </a:txBody>
+                  <a:tcPr marL="33993" marR="33993" marT="16997" marB="16997" anchor="ctr"/>
+                </a:tc>
+                <a:tc>
+                  <a:txBody>
+                    <a:bodyPr/>
+                    <a:lstStyle/>
+                    <a:p>
+                      <a:pPr>
+                        <a:buNone/>
+                      </a:pPr>
+                      <a:r>
+                        <a:rPr lang="en-US" sz="1200">
+                          <a:effectLst/>
+                        </a:rPr>
+                        <a:t>Simple web dev, widely hosted</a:t>
+                      </a:r>
+                    </a:p>
+                  </a:txBody>
+                  <a:tcPr marL="33993" marR="33993" marT="16997" marB="16997" anchor="ctr"/>
+                </a:tc>
+                <a:tc>
+                  <a:txBody>
+                    <a:bodyPr/>
+                    <a:lstStyle/>
+                    <a:p>
+                      <a:pPr>
+                        <a:buNone/>
+                      </a:pPr>
+                      <a:r>
+                        <a:rPr lang="en-US" sz="1200" dirty="0">
+                          <a:effectLst/>
+                        </a:rPr>
+                        <a:t>Web-centric, JIT often small wins for typical apps</a:t>
+                      </a:r>
+                    </a:p>
+                  </a:txBody>
+                  <a:tcPr marL="33993" marR="33993" marT="16997" marB="16997" anchor="ctr"/>
+                </a:tc>
+                <a:extLst>
+                  <a:ext uri="{0D108BD9-81ED-4DB2-BD59-A6C34878D82A}">
+                    <a16:rowId xmlns:a16="http://schemas.microsoft.com/office/drawing/2014/main" val="1925085772"/>
+                  </a:ext>
+                </a:extLst>
+              </a:tr>
+              <a:tr h="339932">
+                <a:tc>
+                  <a:txBody>
+                    <a:bodyPr/>
+                    <a:lstStyle/>
+                    <a:p>
+                      <a:pPr>
+                        <a:buNone/>
+                      </a:pPr>
+                      <a:r>
+                        <a:rPr lang="en-US" sz="1200" b="1">
+                          <a:effectLst/>
+                        </a:rPr>
+                        <a:t>PowerShell</a:t>
+                      </a:r>
+                      <a:endParaRPr lang="en-US" sz="1200">
+                        <a:effectLst/>
+                      </a:endParaRPr>
+                    </a:p>
+                  </a:txBody>
+                  <a:tcPr marL="33993" marR="33993" marT="16997" marB="16997" anchor="ctr"/>
+                </a:tc>
+                <a:tc>
+                  <a:txBody>
+                    <a:bodyPr/>
+                    <a:lstStyle/>
+                    <a:p>
+                      <a:pPr>
+                        <a:buNone/>
+                      </a:pPr>
+                      <a:r>
+                        <a:rPr lang="en-US" sz="1200" b="1">
+                          <a:effectLst/>
+                        </a:rPr>
+                        <a:t>Interpreted</a:t>
+                      </a:r>
+                      <a:endParaRPr lang="en-US" sz="1200">
+                        <a:effectLst/>
+                      </a:endParaRPr>
+                    </a:p>
+                  </a:txBody>
+                  <a:tcPr marL="33993" marR="33993" marT="16997" marB="16997" anchor="ctr"/>
+                </a:tc>
+                <a:tc>
+                  <a:txBody>
+                    <a:bodyPr/>
+                    <a:lstStyle/>
+                    <a:p>
+                      <a:pPr>
+                        <a:buNone/>
+                      </a:pPr>
+                      <a:r>
+                        <a:rPr lang="en-US" sz="1200">
+                          <a:effectLst/>
+                        </a:rPr>
+                        <a:t>Excellent Windows/Azure automation</a:t>
+                      </a:r>
+                    </a:p>
+                  </a:txBody>
+                  <a:tcPr marL="33993" marR="33993" marT="16997" marB="16997" anchor="ctr"/>
+                </a:tc>
+                <a:tc>
+                  <a:txBody>
+                    <a:bodyPr/>
+                    <a:lstStyle/>
+                    <a:p>
+                      <a:pPr>
+                        <a:buNone/>
+                      </a:pPr>
+                      <a:r>
+                        <a:rPr lang="en-US" sz="1200" dirty="0">
+                          <a:effectLst/>
+                        </a:rPr>
+                        <a:t>Not for high-perf apps/loops</a:t>
+                      </a:r>
+                    </a:p>
+                  </a:txBody>
+                  <a:tcPr marL="33993" marR="33993" marT="16997" marB="16997" anchor="ctr"/>
+                </a:tc>
+                <a:extLst>
+                  <a:ext uri="{0D108BD9-81ED-4DB2-BD59-A6C34878D82A}">
+                    <a16:rowId xmlns:a16="http://schemas.microsoft.com/office/drawing/2014/main" val="3404553948"/>
+                  </a:ext>
+                </a:extLst>
+              </a:tr>
+              <a:tr h="951810">
+                <a:tc>
+                  <a:txBody>
+                    <a:bodyPr/>
+                    <a:lstStyle/>
+                    <a:p>
+                      <a:pPr>
+                        <a:buNone/>
+                      </a:pPr>
+                      <a:r>
+                        <a:rPr lang="en-US" sz="1200" b="1">
+                          <a:effectLst/>
+                        </a:rPr>
+                        <a:t>JavaScript</a:t>
+                      </a:r>
+                      <a:endParaRPr lang="en-US" sz="1200">
+                        <a:effectLst/>
+                      </a:endParaRPr>
+                    </a:p>
+                  </a:txBody>
+                  <a:tcPr marL="33993" marR="33993" marT="16997" marB="16997" anchor="ctr"/>
+                </a:tc>
+                <a:tc>
+                  <a:txBody>
+                    <a:bodyPr/>
+                    <a:lstStyle/>
+                    <a:p>
+                      <a:pPr>
+                        <a:buNone/>
+                      </a:pPr>
+                      <a:r>
+                        <a:rPr lang="en-US" sz="1200" b="1">
+                          <a:effectLst/>
+                        </a:rPr>
+                        <a:t>Interpreted + JIT</a:t>
+                      </a:r>
+                      <a:r>
+                        <a:rPr lang="en-US" sz="1200">
+                          <a:effectLst/>
+                        </a:rPr>
+                        <a:t> (engine optimizes hot paths)</a:t>
+                      </a:r>
+                    </a:p>
+                  </a:txBody>
+                  <a:tcPr marL="33993" marR="33993" marT="16997" marB="16997" anchor="ctr"/>
+                </a:tc>
+                <a:tc>
+                  <a:txBody>
+                    <a:bodyPr/>
+                    <a:lstStyle/>
+                    <a:p>
+                      <a:pPr>
+                        <a:buNone/>
+                      </a:pPr>
+                      <a:r>
+                        <a:rPr lang="en-US" sz="1200">
+                          <a:effectLst/>
+                        </a:rPr>
+                        <a:t>Ubiquitous (browser + Node), great for I/O + realtime</a:t>
+                      </a:r>
+                    </a:p>
+                  </a:txBody>
+                  <a:tcPr marL="33993" marR="33993" marT="16997" marB="16997" anchor="ctr"/>
+                </a:tc>
+                <a:tc>
+                  <a:txBody>
+                    <a:bodyPr/>
+                    <a:lstStyle/>
+                    <a:p>
+                      <a:pPr>
+                        <a:buNone/>
+                      </a:pPr>
+                      <a:r>
+                        <a:rPr lang="en-US" sz="1200" dirty="0">
+                          <a:effectLst/>
+                        </a:rPr>
+                        <a:t>Async complexity; performance can vary due to browsers</a:t>
+                      </a:r>
+                    </a:p>
+                  </a:txBody>
+                  <a:tcPr marL="33993" marR="33993" marT="16997" marB="16997" anchor="ctr"/>
+                </a:tc>
+                <a:extLst>
+                  <a:ext uri="{0D108BD9-81ED-4DB2-BD59-A6C34878D82A}">
+                    <a16:rowId xmlns:a16="http://schemas.microsoft.com/office/drawing/2014/main" val="2448802304"/>
+                  </a:ext>
+                </a:extLst>
+              </a:tr>
+            </a:tbl>
+          </a:graphicData>
+        </a:graphic>
+      </p:graphicFrame>
     </p:spTree>
     <p:extLst>
       <p:ext uri="{BB962C8B-B14F-4D97-AF65-F5344CB8AC3E}">
@@ -5071,12 +5211,59 @@
           <a:chExt cx="0" cy="0"/>
         </a:xfrm>
       </p:grpSpPr>
-      <p:sp>
-        <p:nvSpPr>
-          <p:cNvPr id="6" name="Title 5">
-            <a:extLst>
-              <a:ext uri="{FF2B5EF4-FFF2-40B4-BE49-F238E27FC236}">
-                <a16:creationId xmlns:a16="http://schemas.microsoft.com/office/drawing/2014/main" id="{70A7EF77-B3A6-4EC7-9C15-89EEB984E020}"/>
+      <p:pic>
+        <p:nvPicPr>
+          <p:cNvPr id="2050" name="Picture 2" descr="Performance And Development Speed Comparison Of Programming Languages ...">
+            <a:extLst>
+              <a:ext uri="{FF2B5EF4-FFF2-40B4-BE49-F238E27FC236}">
+                <a16:creationId xmlns:a16="http://schemas.microsoft.com/office/drawing/2014/main" id="{D66C636B-41F6-1728-3CFE-D3837B003741}"/>
+              </a:ext>
+            </a:extLst>
+          </p:cNvPr>
+          <p:cNvPicPr>
+            <a:picLocks noChangeAspect="1" noChangeArrowheads="1"/>
+          </p:cNvPicPr>
+          <p:nvPr/>
+        </p:nvPicPr>
+        <p:blipFill>
+          <a:blip r:embed="rId2">
+            <a:extLst>
+              <a:ext uri="{28A0092B-C50C-407E-A947-70E740481C1C}">
+                <a14:useLocalDpi xmlns:a14="http://schemas.microsoft.com/office/drawing/2010/main" val="0"/>
+              </a:ext>
+            </a:extLst>
+          </a:blip>
+          <a:srcRect/>
+          <a:stretch>
+            <a:fillRect/>
+          </a:stretch>
+        </p:blipFill>
+        <p:spPr bwMode="auto">
+          <a:xfrm>
+            <a:off x="2468707" y="883486"/>
+            <a:ext cx="7608153" cy="5854409"/>
+          </a:xfrm>
+          <a:prstGeom prst="rect">
+            <a:avLst/>
+          </a:prstGeom>
+          <a:noFill/>
+          <a:extLst>
+            <a:ext uri="{909E8E84-426E-40DD-AFC4-6F175D3DCCD1}">
+              <a14:hiddenFill xmlns:a14="http://schemas.microsoft.com/office/drawing/2010/main">
+                <a:solidFill>
+                  <a:srgbClr val="FFFFFF"/>
+                </a:solidFill>
+              </a14:hiddenFill>
+            </a:ext>
+          </a:extLst>
+        </p:spPr>
+      </p:pic>
+      <p:sp>
+        <p:nvSpPr>
+          <p:cNvPr id="5" name="Title 1">
+            <a:extLst>
+              <a:ext uri="{FF2B5EF4-FFF2-40B4-BE49-F238E27FC236}">
+                <a16:creationId xmlns:a16="http://schemas.microsoft.com/office/drawing/2014/main" id="{4BC49506-0007-AA23-1101-125D37B97C46}"/>
               </a:ext>
             </a:extLst>
           </p:cNvPr>
@@ -5089,29 +5276,57 @@
         </p:nvSpPr>
         <p:spPr>
           <a:xfrm>
-            <a:off x="1517904" y="1517904"/>
-            <a:ext cx="9144000" cy="1280160"/>
+            <a:off x="7413249" y="159884"/>
+            <a:ext cx="4114800" cy="4572000"/>
           </a:xfrm>
         </p:spPr>
         <p:txBody>
-          <a:bodyPr>
-            <a:noAutofit/>
-          </a:bodyPr>
+          <a:bodyPr/>
           <a:lstStyle/>
           <a:p>
             <a:r>
               <a:rPr lang="en-US" dirty="0"/>
-              <a:t>Why PowerShell Today</a:t>
-            </a:r>
-          </a:p>
-        </p:txBody>
-      </p:sp>
-      <p:sp>
-        <p:nvSpPr>
-          <p:cNvPr id="3" name="Content Placeholder 2">
-            <a:extLst>
-              <a:ext uri="{FF2B5EF4-FFF2-40B4-BE49-F238E27FC236}">
-                <a16:creationId xmlns:a16="http://schemas.microsoft.com/office/drawing/2014/main" id="{975B74AE-546C-4A26-BDD5-2BD124FD2C39}"/>
+              <a:t>Market share</a:t>
+            </a:r>
+          </a:p>
+        </p:txBody>
+      </p:sp>
+    </p:spTree>
+    <p:extLst>
+      <p:ext uri="{BB962C8B-B14F-4D97-AF65-F5344CB8AC3E}">
+        <p14:creationId xmlns:p14="http://schemas.microsoft.com/office/powerpoint/2010/main" val="1535784786"/>
+      </p:ext>
+    </p:extLst>
+  </p:cSld>
+  <p:clrMapOvr>
+    <a:masterClrMapping/>
+  </p:clrMapOvr>
+</p:sld>
+</file>
+
+<file path=ppt/slides/slide6.xml><?xml version="1.0" encoding="utf-8"?>
+<p:sld xmlns:a="http://schemas.openxmlformats.org/drawingml/2006/main" xmlns:r="http://schemas.openxmlformats.org/officeDocument/2006/relationships" xmlns:p="http://schemas.openxmlformats.org/presentationml/2006/main">
+  <p:cSld>
+    <p:spTree>
+      <p:nvGrpSpPr>
+        <p:cNvPr id="1" name=""/>
+        <p:cNvGrpSpPr/>
+        <p:nvPr/>
+      </p:nvGrpSpPr>
+      <p:grpSpPr>
+        <a:xfrm>
+          <a:off x="0" y="0"/>
+          <a:ext cx="0" cy="0"/>
+          <a:chOff x="0" y="0"/>
+          <a:chExt cx="0" cy="0"/>
+        </a:xfrm>
+      </p:grpSpPr>
+      <p:sp>
+        <p:nvSpPr>
+          <p:cNvPr id="9" name="Title 8">
+            <a:extLst>
+              <a:ext uri="{FF2B5EF4-FFF2-40B4-BE49-F238E27FC236}">
+                <a16:creationId xmlns:a16="http://schemas.microsoft.com/office/drawing/2014/main" id="{AF764D8E-8D44-4B0E-A17E-DF05833AC7B7}"/>
               </a:ext>
             </a:extLst>
           </p:cNvPr>
@@ -5119,13 +5334,48 @@
             <a:spLocks noGrp="1"/>
           </p:cNvSpPr>
           <p:nvPr>
-            <p:ph sz="quarter" idx="14"/>
+            <p:ph type="ctrTitle"/>
           </p:nvPr>
         </p:nvSpPr>
         <p:spPr>
           <a:xfrm>
-            <a:off x="1517650" y="3108325"/>
-            <a:ext cx="8118719" cy="3017838"/>
+            <a:off x="1517904" y="1517904"/>
+            <a:ext cx="5212080" cy="2788920"/>
+          </a:xfrm>
+        </p:spPr>
+        <p:txBody>
+          <a:bodyPr anchor="b" anchorCtr="0">
+            <a:noAutofit/>
+          </a:bodyPr>
+          <a:lstStyle/>
+          <a:p>
+            <a:r>
+              <a:rPr lang="en-US" dirty="0"/>
+              <a:t>Service desk AI agent</a:t>
+            </a:r>
+          </a:p>
+        </p:txBody>
+      </p:sp>
+      <p:sp>
+        <p:nvSpPr>
+          <p:cNvPr id="4" name="Subtitle 3">
+            <a:extLst>
+              <a:ext uri="{FF2B5EF4-FFF2-40B4-BE49-F238E27FC236}">
+                <a16:creationId xmlns:a16="http://schemas.microsoft.com/office/drawing/2014/main" id="{EE30C49B-3963-5357-7913-37FEE1C74688}"/>
+              </a:ext>
+            </a:extLst>
+          </p:cNvPr>
+          <p:cNvSpPr>
+            <a:spLocks noGrp="1"/>
+          </p:cNvSpPr>
+          <p:nvPr>
+            <p:ph type="subTitle" idx="1"/>
+          </p:nvPr>
+        </p:nvSpPr>
+        <p:spPr>
+          <a:xfrm>
+            <a:off x="1517904" y="4571999"/>
+            <a:ext cx="5212080" cy="1645920"/>
           </a:xfrm>
         </p:spPr>
         <p:txBody>
@@ -5134,51 +5384,45 @@
           </a:bodyPr>
           <a:lstStyle/>
           <a:p>
-            <a:pPr>
-              <a:buFont typeface="Arial" panose="020B0604020202020204" pitchFamily="34" charset="0"/>
-              <a:buChar char="•"/>
-            </a:pPr>
             <a:r>
               <a:rPr lang="en-US" dirty="0"/>
-              <a:t>Runs well in this environment</a:t>
-            </a:r>
-          </a:p>
-          <a:p>
-            <a:pPr>
-              <a:buFont typeface="Arial" panose="020B0604020202020204" pitchFamily="34" charset="0"/>
-              <a:buChar char="•"/>
-            </a:pPr>
-            <a:r>
-              <a:rPr lang="en-US" dirty="0"/>
-              <a:t>Great for CSV and operational data tasks</a:t>
-            </a:r>
-          </a:p>
-          <a:p>
-            <a:pPr>
-              <a:buFont typeface="Arial" panose="020B0604020202020204" pitchFamily="34" charset="0"/>
-              <a:buChar char="•"/>
-            </a:pPr>
-            <a:r>
-              <a:rPr lang="en-US" dirty="0"/>
-              <a:t>Good beginner path for scripting fundamentals</a:t>
-            </a:r>
-          </a:p>
-          <a:p>
-            <a:pPr>
-              <a:buFont typeface="Arial" panose="020B0604020202020204" pitchFamily="34" charset="0"/>
-              <a:buChar char="•"/>
-            </a:pPr>
-            <a:r>
-              <a:rPr lang="en-US" dirty="0"/>
-              <a:t>Directly useful for service desk workflows</a:t>
-            </a:r>
-          </a:p>
-        </p:txBody>
-      </p:sp>
+              <a:t>Thanks Dean!</a:t>
+            </a:r>
+          </a:p>
+        </p:txBody>
+      </p:sp>
+      <p:pic>
+        <p:nvPicPr>
+          <p:cNvPr id="8" name="Picture Placeholder 7" descr="Close up of lemon slice">
+            <a:extLst>
+              <a:ext uri="{FF2B5EF4-FFF2-40B4-BE49-F238E27FC236}">
+                <a16:creationId xmlns:a16="http://schemas.microsoft.com/office/drawing/2014/main" id="{794FCA34-8775-307F-A2B4-9661CAE5877F}"/>
+              </a:ext>
+            </a:extLst>
+          </p:cNvPr>
+          <p:cNvPicPr>
+            <a:picLocks noGrp="1" noChangeAspect="1"/>
+          </p:cNvPicPr>
+          <p:nvPr>
+            <p:ph type="pic" sz="quarter" idx="13"/>
+          </p:nvPr>
+        </p:nvPicPr>
+        <p:blipFill rotWithShape="1">
+          <a:blip r:embed="rId3"/>
+          <a:srcRect t="7" b="7"/>
+          <a:stretch/>
+        </p:blipFill>
+        <p:spPr>
+          <a:xfrm>
+            <a:off x="7013448" y="756284"/>
+            <a:ext cx="4434840" cy="5349240"/>
+          </a:xfrm>
+        </p:spPr>
+      </p:pic>
     </p:spTree>
     <p:extLst>
       <p:ext uri="{BB962C8B-B14F-4D97-AF65-F5344CB8AC3E}">
-        <p14:creationId xmlns:p14="http://schemas.microsoft.com/office/powerpoint/2010/main" val="3060177673"/>
+        <p14:creationId xmlns:p14="http://schemas.microsoft.com/office/powerpoint/2010/main" val="714287392"/>
       </p:ext>
     </p:extLst>
   </p:cSld>
@@ -6000,15 +6244,6 @@
 </file>
 
 <file path=customXml/item1.xml><?xml version="1.0" encoding="utf-8"?>
-<?mso-contentType ?>
-<FormTemplates xmlns="http://schemas.microsoft.com/sharepoint/v3/contenttype/forms">
-  <Display>DocumentLibraryForm</Display>
-  <Edit>DocumentLibraryForm</Edit>
-  <New>DocumentLibraryForm</New>
-</FormTemplates>
-</file>
-
-<file path=customXml/item2.xml><?xml version="1.0" encoding="utf-8"?>
 <ct:contentTypeSchema xmlns:ct="http://schemas.microsoft.com/office/2006/metadata/contentType" xmlns:ma="http://schemas.microsoft.com/office/2006/metadata/properties/metaAttributes" ct:_="" ma:_="" ma:contentTypeName="Document" ma:contentTypeID="0x01010079F111ED35F8CC479449609E8A0923A6" ma:contentTypeVersion="28" ma:contentTypeDescription="Create a new document." ma:contentTypeScope="" ma:versionID="60f5a4f2d2b0abadcf532d48ebf9cb71">
   <xsd:schema xmlns:xsd="http://www.w3.org/2001/XMLSchema" xmlns:xs="http://www.w3.org/2001/XMLSchema" xmlns:p="http://schemas.microsoft.com/office/2006/metadata/properties" xmlns:ns1="http://schemas.microsoft.com/sharepoint/v3" xmlns:ns2="71af3243-3dd4-4a8d-8c0d-dd76da1f02a5" xmlns:ns3="16c05727-aa75-4e4a-9b5f-8a80a1165891" xmlns:ns4="230e9df3-be65-4c73-a93b-d1236ebd677e" targetNamespace="http://schemas.microsoft.com/office/2006/metadata/properties" ma:root="true" ma:fieldsID="7dd78129e6a1811f84807ad11c651531" ns1:_="" ns2:_="" ns3:_="" ns4:_="">
     <xsd:import namespace="http://schemas.microsoft.com/sharepoint/v3"/>
@@ -6320,6 +6555,15 @@
 </ct:contentTypeSchema>
 </file>
 
+<file path=customXml/item2.xml><?xml version="1.0" encoding="utf-8"?>
+<?mso-contentType ?>
+<FormTemplates xmlns="http://schemas.microsoft.com/sharepoint/v3/contenttype/forms">
+  <Display>DocumentLibraryForm</Display>
+  <Edit>DocumentLibraryForm</Edit>
+  <New>DocumentLibraryForm</New>
+</FormTemplates>
+</file>
+
 <file path=customXml/item3.xml><?xml version="1.0" encoding="utf-8"?>
 <p:properties xmlns:p="http://schemas.microsoft.com/office/2006/metadata/properties" xmlns:xsi="http://www.w3.org/2001/XMLSchema-instance" xmlns:pc="http://schemas.microsoft.com/office/infopath/2007/PartnerControls">
   <documentManagement>
@@ -6341,14 +6585,6 @@
 </file>
 
 <file path=customXml/itemProps1.xml><?xml version="1.0" encoding="utf-8"?>
-<ds:datastoreItem xmlns:ds="http://schemas.openxmlformats.org/officeDocument/2006/customXml" ds:itemID="{16D4D9BD-AE11-4F3A-9185-74D1F42CA599}">
-  <ds:schemaRefs>
-    <ds:schemaRef ds:uri="http://schemas.microsoft.com/sharepoint/v3/contenttype/forms"/>
-  </ds:schemaRefs>
-</ds:datastoreItem>
-</file>
-
-<file path=customXml/itemProps2.xml><?xml version="1.0" encoding="utf-8"?>
 <ds:datastoreItem xmlns:ds="http://schemas.openxmlformats.org/officeDocument/2006/customXml" ds:itemID="{4CA8F0A8-0272-4870-9FED-50919032B813}">
   <ds:schemaRefs>
     <ds:schemaRef ds:uri="http://schemas.microsoft.com/office/2006/metadata/contentType"/>
@@ -6369,6 +6605,14 @@
 </ds:datastoreItem>
 </file>
 
+<file path=customXml/itemProps2.xml><?xml version="1.0" encoding="utf-8"?>
+<ds:datastoreItem xmlns:ds="http://schemas.openxmlformats.org/officeDocument/2006/customXml" ds:itemID="{16D4D9BD-AE11-4F3A-9185-74D1F42CA599}">
+  <ds:schemaRefs>
+    <ds:schemaRef ds:uri="http://schemas.microsoft.com/sharepoint/v3/contenttype/forms"/>
+  </ds:schemaRefs>
+</ds:datastoreItem>
+</file>
+
 <file path=customXml/itemProps3.xml><?xml version="1.0" encoding="utf-8"?>
 <ds:datastoreItem xmlns:ds="http://schemas.openxmlformats.org/officeDocument/2006/customXml" ds:itemID="{B2B7AAFC-BA46-4192-9EDD-FC31D26BDA5D}">
   <ds:schemaRefs>
